--- a/data/FF/FF49.pptx
+++ b/data/FF/FF49.pptx
@@ -5,18 +5,18 @@
     <p:sldMasterId id="2147483648" r:id="rId1"/>
   </p:sldMasterIdLst>
   <p:sldIdLst>
-    <p:sldId id="256" r:id="rId2"/>
-    <p:sldId id="257" r:id="rId3"/>
-    <p:sldId id="258" r:id="rId4"/>
-    <p:sldId id="259" r:id="rId5"/>
-    <p:sldId id="260" r:id="rId6"/>
-    <p:sldId id="261" r:id="rId7"/>
+    <p:sldId id="256" r:id="rId6"/>
+    <p:sldId id="257" r:id="rId7"/>
+    <p:sldId id="258" r:id="rId8"/>
+    <p:sldId id="259" r:id="rId9"/>
+    <p:sldId id="260" r:id="rId10"/>
+    <p:sldId id="261" r:id="rId11"/>
   </p:sldIdLst>
-  <p:sldSz cx="9144000" cy="6858000" type="screen4x3"/>
+  <p:sldSz cx="12192000" cy="6858000"/>
   <p:notesSz cx="6858000" cy="9144000"/>
   <p:defaultTextStyle>
     <a:defPPr>
-      <a:defRPr lang="fr-FR"/>
+      <a:defRPr lang="en-US"/>
     </a:defPPr>
     <a:lvl1pPr marL="0" algn="l" defTabSz="914400" rtl="0" eaLnBrk="1" latinLnBrk="0" hangingPunct="1">
       <a:defRPr sz="1800" kern="1200">
@@ -114,7 +114,7 @@
 
 <file path=ppt/slideLayouts/slideLayout1.xml><?xml version="1.0" encoding="utf-8"?>
 <p:sldLayout xmlns:a="http://schemas.openxmlformats.org/drawingml/2006/main" xmlns:r="http://schemas.openxmlformats.org/officeDocument/2006/relationships" xmlns:p="http://schemas.openxmlformats.org/presentationml/2006/main" type="title" preserve="1">
-  <p:cSld name="Diapositive de titre">
+  <p:cSld name="Title Slide">
     <p:spTree>
       <p:nvGrpSpPr>
         <p:cNvPr id="1" name=""/>
@@ -131,7 +131,7 @@
       </p:grpSpPr>
       <p:sp>
         <p:nvSpPr>
-          <p:cNvPr id="2" name="Titre 1"/>
+          <p:cNvPr id="2" name="Title 1"/>
           <p:cNvSpPr>
             <a:spLocks noGrp="1"/>
           </p:cNvSpPr>
@@ -150,16 +150,16 @@
           <a:lstStyle/>
           <a:p>
             <a:r>
-              <a:rPr lang="fr-FR" smtClean="0"/>
-              <a:t>Modifiez le style du titre</a:t>
-            </a:r>
-            <a:endParaRPr lang="fr-FR"/>
-          </a:p>
-        </p:txBody>
-      </p:sp>
-      <p:sp>
-        <p:nvSpPr>
-          <p:cNvPr id="3" name="Sous-titre 2"/>
+              <a:rPr lang="en-US" smtClean="0"/>
+              <a:t>Click to edit Master title style</a:t>
+            </a:r>
+            <a:endParaRPr lang="en-US"/>
+          </a:p>
+        </p:txBody>
+      </p:sp>
+      <p:sp>
+        <p:nvSpPr>
+          <p:cNvPr id="3" name="Subtitle 2"/>
           <p:cNvSpPr>
             <a:spLocks noGrp="1"/>
           </p:cNvSpPr>
@@ -269,16 +269,16 @@
           </a:lstStyle>
           <a:p>
             <a:r>
-              <a:rPr lang="fr-FR" smtClean="0"/>
-              <a:t>Modifiez le style des sous-titres du masque</a:t>
-            </a:r>
-            <a:endParaRPr lang="fr-FR"/>
-          </a:p>
-        </p:txBody>
-      </p:sp>
-      <p:sp>
-        <p:nvSpPr>
-          <p:cNvPr id="4" name="Espace réservé de la date 3"/>
+              <a:rPr lang="en-US" smtClean="0"/>
+              <a:t>Click to edit Master subtitle style</a:t>
+            </a:r>
+            <a:endParaRPr lang="en-US"/>
+          </a:p>
+        </p:txBody>
+      </p:sp>
+      <p:sp>
+        <p:nvSpPr>
+          <p:cNvPr id="4" name="Date Placeholder 3"/>
           <p:cNvSpPr>
             <a:spLocks noGrp="1"/>
           </p:cNvSpPr>
@@ -291,17 +291,18 @@
           <a:bodyPr/>
           <a:lstStyle/>
           <a:p>
-            <a:fld id="{37C9372A-580F-4C71-95A0-1180FA684201}" type="datetimeFigureOut">
-              <a:rPr lang="fr-FR" smtClean="0"/>
-              <a:t>13/11/2012</a:t>
+            <a:fld id="{1D8BD707-D9CF-40AE-B4C6-C98DA3205C09}" type="datetimeFigureOut">
+              <a:rPr lang="en-US" smtClean="0"/>
+              <a:pPr/>
+              <a:t>8/1/2011</a:t>
             </a:fld>
-            <a:endParaRPr lang="fr-FR"/>
-          </a:p>
-        </p:txBody>
-      </p:sp>
-      <p:sp>
-        <p:nvSpPr>
-          <p:cNvPr id="5" name="Espace réservé du pied de page 4"/>
+            <a:endParaRPr lang="en-US"/>
+          </a:p>
+        </p:txBody>
+      </p:sp>
+      <p:sp>
+        <p:nvSpPr>
+          <p:cNvPr id="5" name="Footer Placeholder 4"/>
           <p:cNvSpPr>
             <a:spLocks noGrp="1"/>
           </p:cNvSpPr>
@@ -314,13 +315,13 @@
           <a:bodyPr/>
           <a:lstStyle/>
           <a:p>
-            <a:endParaRPr lang="fr-FR"/>
-          </a:p>
-        </p:txBody>
-      </p:sp>
-      <p:sp>
-        <p:nvSpPr>
-          <p:cNvPr id="6" name="Espace réservé du numéro de diapositive 5"/>
+            <a:endParaRPr lang="en-US"/>
+          </a:p>
+        </p:txBody>
+      </p:sp>
+      <p:sp>
+        <p:nvSpPr>
+          <p:cNvPr id="6" name="Slide Number Placeholder 5"/>
           <p:cNvSpPr>
             <a:spLocks noGrp="1"/>
           </p:cNvSpPr>
@@ -333,20 +334,16 @@
           <a:bodyPr/>
           <a:lstStyle/>
           <a:p>
-            <a:fld id="{2AEFD289-973E-4146-B99A-5687E204E7F9}" type="slidenum">
-              <a:rPr lang="fr-FR" smtClean="0"/>
-              <a:t>‹N°›</a:t>
+            <a:fld id="{B6F15528-21DE-4FAA-801E-634DDDAF4B2B}" type="slidenum">
+              <a:rPr lang="en-US" smtClean="0"/>
+              <a:pPr/>
+              <a:t>‹#›</a:t>
             </a:fld>
-            <a:endParaRPr lang="fr-FR"/>
+            <a:endParaRPr lang="en-US"/>
           </a:p>
         </p:txBody>
       </p:sp>
     </p:spTree>
-    <p:extLst>
-      <p:ext uri="{BB962C8B-B14F-4D97-AF65-F5344CB8AC3E}">
-        <p14:creationId xmlns:p14="http://schemas.microsoft.com/office/powerpoint/2010/main" val="1860683390"/>
-      </p:ext>
-    </p:extLst>
   </p:cSld>
   <p:clrMapOvr>
     <a:masterClrMapping/>
@@ -356,7 +353,7 @@
 
 <file path=ppt/slideLayouts/slideLayout10.xml><?xml version="1.0" encoding="utf-8"?>
 <p:sldLayout xmlns:a="http://schemas.openxmlformats.org/drawingml/2006/main" xmlns:r="http://schemas.openxmlformats.org/officeDocument/2006/relationships" xmlns:p="http://schemas.openxmlformats.org/presentationml/2006/main" type="vertTx" preserve="1">
-  <p:cSld name="Titre et texte vertical">
+  <p:cSld name="Title and Vertical Text">
     <p:spTree>
       <p:nvGrpSpPr>
         <p:cNvPr id="1" name=""/>
@@ -373,7 +370,7 @@
       </p:grpSpPr>
       <p:sp>
         <p:nvSpPr>
-          <p:cNvPr id="2" name="Titre 1"/>
+          <p:cNvPr id="2" name="Title 1"/>
           <p:cNvSpPr>
             <a:spLocks noGrp="1"/>
           </p:cNvSpPr>
@@ -387,16 +384,16 @@
           <a:lstStyle/>
           <a:p>
             <a:r>
-              <a:rPr lang="fr-FR" smtClean="0"/>
-              <a:t>Modifiez le style du titre</a:t>
-            </a:r>
-            <a:endParaRPr lang="fr-FR"/>
-          </a:p>
-        </p:txBody>
-      </p:sp>
-      <p:sp>
-        <p:nvSpPr>
-          <p:cNvPr id="3" name="Espace réservé du texte vertical 2"/>
+              <a:rPr lang="en-US" smtClean="0"/>
+              <a:t>Click to edit Master title style</a:t>
+            </a:r>
+            <a:endParaRPr lang="en-US"/>
+          </a:p>
+        </p:txBody>
+      </p:sp>
+      <p:sp>
+        <p:nvSpPr>
+          <p:cNvPr id="3" name="Vertical Text Placeholder 2"/>
           <p:cNvSpPr>
             <a:spLocks noGrp="1"/>
           </p:cNvSpPr>
@@ -411,44 +408,44 @@
           <a:p>
             <a:pPr lvl="0"/>
             <a:r>
-              <a:rPr lang="fr-FR" smtClean="0"/>
-              <a:t>Modifiez les styles du texte du masque</a:t>
+              <a:rPr lang="en-US" smtClean="0"/>
+              <a:t>Click to edit Master text styles</a:t>
             </a:r>
           </a:p>
           <a:p>
             <a:pPr lvl="1"/>
             <a:r>
-              <a:rPr lang="fr-FR" smtClean="0"/>
-              <a:t>Deuxième niveau</a:t>
+              <a:rPr lang="en-US" smtClean="0"/>
+              <a:t>Second level</a:t>
             </a:r>
           </a:p>
           <a:p>
             <a:pPr lvl="2"/>
             <a:r>
-              <a:rPr lang="fr-FR" smtClean="0"/>
-              <a:t>Troisième niveau</a:t>
+              <a:rPr lang="en-US" smtClean="0"/>
+              <a:t>Third level</a:t>
             </a:r>
           </a:p>
           <a:p>
             <a:pPr lvl="3"/>
             <a:r>
-              <a:rPr lang="fr-FR" smtClean="0"/>
-              <a:t>Quatrième niveau</a:t>
+              <a:rPr lang="en-US" smtClean="0"/>
+              <a:t>Fourth level</a:t>
             </a:r>
           </a:p>
           <a:p>
             <a:pPr lvl="4"/>
             <a:r>
-              <a:rPr lang="fr-FR" smtClean="0"/>
-              <a:t>Cinquième niveau</a:t>
-            </a:r>
-            <a:endParaRPr lang="fr-FR"/>
-          </a:p>
-        </p:txBody>
-      </p:sp>
-      <p:sp>
-        <p:nvSpPr>
-          <p:cNvPr id="4" name="Espace réservé de la date 3"/>
+              <a:rPr lang="en-US" smtClean="0"/>
+              <a:t>Fifth level</a:t>
+            </a:r>
+            <a:endParaRPr lang="en-US"/>
+          </a:p>
+        </p:txBody>
+      </p:sp>
+      <p:sp>
+        <p:nvSpPr>
+          <p:cNvPr id="4" name="Date Placeholder 3"/>
           <p:cNvSpPr>
             <a:spLocks noGrp="1"/>
           </p:cNvSpPr>
@@ -461,17 +458,18 @@
           <a:bodyPr/>
           <a:lstStyle/>
           <a:p>
-            <a:fld id="{37C9372A-580F-4C71-95A0-1180FA684201}" type="datetimeFigureOut">
-              <a:rPr lang="fr-FR" smtClean="0"/>
-              <a:t>13/11/2012</a:t>
+            <a:fld id="{1D8BD707-D9CF-40AE-B4C6-C98DA3205C09}" type="datetimeFigureOut">
+              <a:rPr lang="en-US" smtClean="0"/>
+              <a:pPr/>
+              <a:t>8/1/2011</a:t>
             </a:fld>
-            <a:endParaRPr lang="fr-FR"/>
-          </a:p>
-        </p:txBody>
-      </p:sp>
-      <p:sp>
-        <p:nvSpPr>
-          <p:cNvPr id="5" name="Espace réservé du pied de page 4"/>
+            <a:endParaRPr lang="en-US"/>
+          </a:p>
+        </p:txBody>
+      </p:sp>
+      <p:sp>
+        <p:nvSpPr>
+          <p:cNvPr id="5" name="Footer Placeholder 4"/>
           <p:cNvSpPr>
             <a:spLocks noGrp="1"/>
           </p:cNvSpPr>
@@ -484,13 +482,13 @@
           <a:bodyPr/>
           <a:lstStyle/>
           <a:p>
-            <a:endParaRPr lang="fr-FR"/>
-          </a:p>
-        </p:txBody>
-      </p:sp>
-      <p:sp>
-        <p:nvSpPr>
-          <p:cNvPr id="6" name="Espace réservé du numéro de diapositive 5"/>
+            <a:endParaRPr lang="en-US"/>
+          </a:p>
+        </p:txBody>
+      </p:sp>
+      <p:sp>
+        <p:nvSpPr>
+          <p:cNvPr id="6" name="Slide Number Placeholder 5"/>
           <p:cNvSpPr>
             <a:spLocks noGrp="1"/>
           </p:cNvSpPr>
@@ -503,20 +501,16 @@
           <a:bodyPr/>
           <a:lstStyle/>
           <a:p>
-            <a:fld id="{2AEFD289-973E-4146-B99A-5687E204E7F9}" type="slidenum">
-              <a:rPr lang="fr-FR" smtClean="0"/>
-              <a:t>‹N°›</a:t>
+            <a:fld id="{B6F15528-21DE-4FAA-801E-634DDDAF4B2B}" type="slidenum">
+              <a:rPr lang="en-US" smtClean="0"/>
+              <a:pPr/>
+              <a:t>‹#›</a:t>
             </a:fld>
-            <a:endParaRPr lang="fr-FR"/>
+            <a:endParaRPr lang="en-US"/>
           </a:p>
         </p:txBody>
       </p:sp>
     </p:spTree>
-    <p:extLst>
-      <p:ext uri="{BB962C8B-B14F-4D97-AF65-F5344CB8AC3E}">
-        <p14:creationId xmlns:p14="http://schemas.microsoft.com/office/powerpoint/2010/main" val="1896482603"/>
-      </p:ext>
-    </p:extLst>
   </p:cSld>
   <p:clrMapOvr>
     <a:masterClrMapping/>
@@ -526,7 +520,7 @@
 
 <file path=ppt/slideLayouts/slideLayout11.xml><?xml version="1.0" encoding="utf-8"?>
 <p:sldLayout xmlns:a="http://schemas.openxmlformats.org/drawingml/2006/main" xmlns:r="http://schemas.openxmlformats.org/officeDocument/2006/relationships" xmlns:p="http://schemas.openxmlformats.org/presentationml/2006/main" type="vertTitleAndTx" preserve="1">
-  <p:cSld name="Titre vertical et texte">
+  <p:cSld name="Vertical Title and Text">
     <p:spTree>
       <p:nvGrpSpPr>
         <p:cNvPr id="1" name=""/>
@@ -543,7 +537,7 @@
       </p:grpSpPr>
       <p:sp>
         <p:nvSpPr>
-          <p:cNvPr id="2" name="Titre vertical 1"/>
+          <p:cNvPr id="2" name="Vertical Title 1"/>
           <p:cNvSpPr>
             <a:spLocks noGrp="1"/>
           </p:cNvSpPr>
@@ -562,16 +556,16 @@
           <a:lstStyle/>
           <a:p>
             <a:r>
-              <a:rPr lang="fr-FR" smtClean="0"/>
-              <a:t>Modifiez le style du titre</a:t>
-            </a:r>
-            <a:endParaRPr lang="fr-FR"/>
-          </a:p>
-        </p:txBody>
-      </p:sp>
-      <p:sp>
-        <p:nvSpPr>
-          <p:cNvPr id="3" name="Espace réservé du texte vertical 2"/>
+              <a:rPr lang="en-US" smtClean="0"/>
+              <a:t>Click to edit Master title style</a:t>
+            </a:r>
+            <a:endParaRPr lang="en-US"/>
+          </a:p>
+        </p:txBody>
+      </p:sp>
+      <p:sp>
+        <p:nvSpPr>
+          <p:cNvPr id="3" name="Vertical Text Placeholder 2"/>
           <p:cNvSpPr>
             <a:spLocks noGrp="1"/>
           </p:cNvSpPr>
@@ -591,44 +585,44 @@
           <a:p>
             <a:pPr lvl="0"/>
             <a:r>
-              <a:rPr lang="fr-FR" smtClean="0"/>
-              <a:t>Modifiez les styles du texte du masque</a:t>
+              <a:rPr lang="en-US" smtClean="0"/>
+              <a:t>Click to edit Master text styles</a:t>
             </a:r>
           </a:p>
           <a:p>
             <a:pPr lvl="1"/>
             <a:r>
-              <a:rPr lang="fr-FR" smtClean="0"/>
-              <a:t>Deuxième niveau</a:t>
+              <a:rPr lang="en-US" smtClean="0"/>
+              <a:t>Second level</a:t>
             </a:r>
           </a:p>
           <a:p>
             <a:pPr lvl="2"/>
             <a:r>
-              <a:rPr lang="fr-FR" smtClean="0"/>
-              <a:t>Troisième niveau</a:t>
+              <a:rPr lang="en-US" smtClean="0"/>
+              <a:t>Third level</a:t>
             </a:r>
           </a:p>
           <a:p>
             <a:pPr lvl="3"/>
             <a:r>
-              <a:rPr lang="fr-FR" smtClean="0"/>
-              <a:t>Quatrième niveau</a:t>
+              <a:rPr lang="en-US" smtClean="0"/>
+              <a:t>Fourth level</a:t>
             </a:r>
           </a:p>
           <a:p>
             <a:pPr lvl="4"/>
             <a:r>
-              <a:rPr lang="fr-FR" smtClean="0"/>
-              <a:t>Cinquième niveau</a:t>
-            </a:r>
-            <a:endParaRPr lang="fr-FR"/>
-          </a:p>
-        </p:txBody>
-      </p:sp>
-      <p:sp>
-        <p:nvSpPr>
-          <p:cNvPr id="4" name="Espace réservé de la date 3"/>
+              <a:rPr lang="en-US" smtClean="0"/>
+              <a:t>Fifth level</a:t>
+            </a:r>
+            <a:endParaRPr lang="en-US"/>
+          </a:p>
+        </p:txBody>
+      </p:sp>
+      <p:sp>
+        <p:nvSpPr>
+          <p:cNvPr id="4" name="Date Placeholder 3"/>
           <p:cNvSpPr>
             <a:spLocks noGrp="1"/>
           </p:cNvSpPr>
@@ -641,17 +635,18 @@
           <a:bodyPr/>
           <a:lstStyle/>
           <a:p>
-            <a:fld id="{37C9372A-580F-4C71-95A0-1180FA684201}" type="datetimeFigureOut">
-              <a:rPr lang="fr-FR" smtClean="0"/>
-              <a:t>13/11/2012</a:t>
+            <a:fld id="{1D8BD707-D9CF-40AE-B4C6-C98DA3205C09}" type="datetimeFigureOut">
+              <a:rPr lang="en-US" smtClean="0"/>
+              <a:pPr/>
+              <a:t>8/1/2011</a:t>
             </a:fld>
-            <a:endParaRPr lang="fr-FR"/>
-          </a:p>
-        </p:txBody>
-      </p:sp>
-      <p:sp>
-        <p:nvSpPr>
-          <p:cNvPr id="5" name="Espace réservé du pied de page 4"/>
+            <a:endParaRPr lang="en-US"/>
+          </a:p>
+        </p:txBody>
+      </p:sp>
+      <p:sp>
+        <p:nvSpPr>
+          <p:cNvPr id="5" name="Footer Placeholder 4"/>
           <p:cNvSpPr>
             <a:spLocks noGrp="1"/>
           </p:cNvSpPr>
@@ -664,13 +659,13 @@
           <a:bodyPr/>
           <a:lstStyle/>
           <a:p>
-            <a:endParaRPr lang="fr-FR"/>
-          </a:p>
-        </p:txBody>
-      </p:sp>
-      <p:sp>
-        <p:nvSpPr>
-          <p:cNvPr id="6" name="Espace réservé du numéro de diapositive 5"/>
+            <a:endParaRPr lang="en-US"/>
+          </a:p>
+        </p:txBody>
+      </p:sp>
+      <p:sp>
+        <p:nvSpPr>
+          <p:cNvPr id="6" name="Slide Number Placeholder 5"/>
           <p:cNvSpPr>
             <a:spLocks noGrp="1"/>
           </p:cNvSpPr>
@@ -683,20 +678,16 @@
           <a:bodyPr/>
           <a:lstStyle/>
           <a:p>
-            <a:fld id="{2AEFD289-973E-4146-B99A-5687E204E7F9}" type="slidenum">
-              <a:rPr lang="fr-FR" smtClean="0"/>
-              <a:t>‹N°›</a:t>
+            <a:fld id="{B6F15528-21DE-4FAA-801E-634DDDAF4B2B}" type="slidenum">
+              <a:rPr lang="en-US" smtClean="0"/>
+              <a:pPr/>
+              <a:t>‹#›</a:t>
             </a:fld>
-            <a:endParaRPr lang="fr-FR"/>
+            <a:endParaRPr lang="en-US"/>
           </a:p>
         </p:txBody>
       </p:sp>
     </p:spTree>
-    <p:extLst>
-      <p:ext uri="{BB962C8B-B14F-4D97-AF65-F5344CB8AC3E}">
-        <p14:creationId xmlns:p14="http://schemas.microsoft.com/office/powerpoint/2010/main" val="1682054016"/>
-      </p:ext>
-    </p:extLst>
   </p:cSld>
   <p:clrMapOvr>
     <a:masterClrMapping/>
@@ -706,7 +697,7 @@
 
 <file path=ppt/slideLayouts/slideLayout2.xml><?xml version="1.0" encoding="utf-8"?>
 <p:sldLayout xmlns:a="http://schemas.openxmlformats.org/drawingml/2006/main" xmlns:r="http://schemas.openxmlformats.org/officeDocument/2006/relationships" xmlns:p="http://schemas.openxmlformats.org/presentationml/2006/main" type="obj" preserve="1">
-  <p:cSld name="Titre et contenu">
+  <p:cSld name="Title and Content">
     <p:spTree>
       <p:nvGrpSpPr>
         <p:cNvPr id="1" name=""/>
@@ -723,7 +714,7 @@
       </p:grpSpPr>
       <p:sp>
         <p:nvSpPr>
-          <p:cNvPr id="2" name="Titre 1"/>
+          <p:cNvPr id="2" name="Title 1"/>
           <p:cNvSpPr>
             <a:spLocks noGrp="1"/>
           </p:cNvSpPr>
@@ -737,16 +728,16 @@
           <a:lstStyle/>
           <a:p>
             <a:r>
-              <a:rPr lang="fr-FR" smtClean="0"/>
-              <a:t>Modifiez le style du titre</a:t>
-            </a:r>
-            <a:endParaRPr lang="fr-FR"/>
-          </a:p>
-        </p:txBody>
-      </p:sp>
-      <p:sp>
-        <p:nvSpPr>
-          <p:cNvPr id="3" name="Espace réservé du contenu 2"/>
+              <a:rPr lang="en-US" smtClean="0"/>
+              <a:t>Click to edit Master title style</a:t>
+            </a:r>
+            <a:endParaRPr lang="en-US"/>
+          </a:p>
+        </p:txBody>
+      </p:sp>
+      <p:sp>
+        <p:nvSpPr>
+          <p:cNvPr id="3" name="Content Placeholder 2"/>
           <p:cNvSpPr>
             <a:spLocks noGrp="1"/>
           </p:cNvSpPr>
@@ -761,44 +752,44 @@
           <a:p>
             <a:pPr lvl="0"/>
             <a:r>
-              <a:rPr lang="fr-FR" smtClean="0"/>
-              <a:t>Modifiez les styles du texte du masque</a:t>
+              <a:rPr lang="en-US" smtClean="0"/>
+              <a:t>Click to edit Master text styles</a:t>
             </a:r>
           </a:p>
           <a:p>
             <a:pPr lvl="1"/>
             <a:r>
-              <a:rPr lang="fr-FR" smtClean="0"/>
-              <a:t>Deuxième niveau</a:t>
+              <a:rPr lang="en-US" smtClean="0"/>
+              <a:t>Second level</a:t>
             </a:r>
           </a:p>
           <a:p>
             <a:pPr lvl="2"/>
             <a:r>
-              <a:rPr lang="fr-FR" smtClean="0"/>
-              <a:t>Troisième niveau</a:t>
+              <a:rPr lang="en-US" smtClean="0"/>
+              <a:t>Third level</a:t>
             </a:r>
           </a:p>
           <a:p>
             <a:pPr lvl="3"/>
             <a:r>
-              <a:rPr lang="fr-FR" smtClean="0"/>
-              <a:t>Quatrième niveau</a:t>
+              <a:rPr lang="en-US" smtClean="0"/>
+              <a:t>Fourth level</a:t>
             </a:r>
           </a:p>
           <a:p>
             <a:pPr lvl="4"/>
             <a:r>
-              <a:rPr lang="fr-FR" smtClean="0"/>
-              <a:t>Cinquième niveau</a:t>
-            </a:r>
-            <a:endParaRPr lang="fr-FR"/>
-          </a:p>
-        </p:txBody>
-      </p:sp>
-      <p:sp>
-        <p:nvSpPr>
-          <p:cNvPr id="4" name="Espace réservé de la date 3"/>
+              <a:rPr lang="en-US" smtClean="0"/>
+              <a:t>Fifth level</a:t>
+            </a:r>
+            <a:endParaRPr lang="en-US"/>
+          </a:p>
+        </p:txBody>
+      </p:sp>
+      <p:sp>
+        <p:nvSpPr>
+          <p:cNvPr id="4" name="Date Placeholder 3"/>
           <p:cNvSpPr>
             <a:spLocks noGrp="1"/>
           </p:cNvSpPr>
@@ -811,17 +802,18 @@
           <a:bodyPr/>
           <a:lstStyle/>
           <a:p>
-            <a:fld id="{37C9372A-580F-4C71-95A0-1180FA684201}" type="datetimeFigureOut">
-              <a:rPr lang="fr-FR" smtClean="0"/>
-              <a:t>13/11/2012</a:t>
+            <a:fld id="{1D8BD707-D9CF-40AE-B4C6-C98DA3205C09}" type="datetimeFigureOut">
+              <a:rPr lang="en-US" smtClean="0"/>
+              <a:pPr/>
+              <a:t>8/1/2011</a:t>
             </a:fld>
-            <a:endParaRPr lang="fr-FR"/>
-          </a:p>
-        </p:txBody>
-      </p:sp>
-      <p:sp>
-        <p:nvSpPr>
-          <p:cNvPr id="5" name="Espace réservé du pied de page 4"/>
+            <a:endParaRPr lang="en-US"/>
+          </a:p>
+        </p:txBody>
+      </p:sp>
+      <p:sp>
+        <p:nvSpPr>
+          <p:cNvPr id="5" name="Footer Placeholder 4"/>
           <p:cNvSpPr>
             <a:spLocks noGrp="1"/>
           </p:cNvSpPr>
@@ -834,13 +826,13 @@
           <a:bodyPr/>
           <a:lstStyle/>
           <a:p>
-            <a:endParaRPr lang="fr-FR"/>
-          </a:p>
-        </p:txBody>
-      </p:sp>
-      <p:sp>
-        <p:nvSpPr>
-          <p:cNvPr id="6" name="Espace réservé du numéro de diapositive 5"/>
+            <a:endParaRPr lang="en-US"/>
+          </a:p>
+        </p:txBody>
+      </p:sp>
+      <p:sp>
+        <p:nvSpPr>
+          <p:cNvPr id="6" name="Slide Number Placeholder 5"/>
           <p:cNvSpPr>
             <a:spLocks noGrp="1"/>
           </p:cNvSpPr>
@@ -853,20 +845,16 @@
           <a:bodyPr/>
           <a:lstStyle/>
           <a:p>
-            <a:fld id="{2AEFD289-973E-4146-B99A-5687E204E7F9}" type="slidenum">
-              <a:rPr lang="fr-FR" smtClean="0"/>
-              <a:t>‹N°›</a:t>
+            <a:fld id="{B6F15528-21DE-4FAA-801E-634DDDAF4B2B}" type="slidenum">
+              <a:rPr lang="en-US" smtClean="0"/>
+              <a:pPr/>
+              <a:t>‹#›</a:t>
             </a:fld>
-            <a:endParaRPr lang="fr-FR"/>
+            <a:endParaRPr lang="en-US"/>
           </a:p>
         </p:txBody>
       </p:sp>
     </p:spTree>
-    <p:extLst>
-      <p:ext uri="{BB962C8B-B14F-4D97-AF65-F5344CB8AC3E}">
-        <p14:creationId xmlns:p14="http://schemas.microsoft.com/office/powerpoint/2010/main" val="705714112"/>
-      </p:ext>
-    </p:extLst>
   </p:cSld>
   <p:clrMapOvr>
     <a:masterClrMapping/>
@@ -876,7 +864,7 @@
 
 <file path=ppt/slideLayouts/slideLayout3.xml><?xml version="1.0" encoding="utf-8"?>
 <p:sldLayout xmlns:a="http://schemas.openxmlformats.org/drawingml/2006/main" xmlns:r="http://schemas.openxmlformats.org/officeDocument/2006/relationships" xmlns:p="http://schemas.openxmlformats.org/presentationml/2006/main" type="secHead" preserve="1">
-  <p:cSld name="Titre de section">
+  <p:cSld name="Section Header">
     <p:spTree>
       <p:nvGrpSpPr>
         <p:cNvPr id="1" name=""/>
@@ -893,7 +881,7 @@
       </p:grpSpPr>
       <p:sp>
         <p:nvSpPr>
-          <p:cNvPr id="2" name="Titre 1"/>
+          <p:cNvPr id="2" name="Title 1"/>
           <p:cNvSpPr>
             <a:spLocks noGrp="1"/>
           </p:cNvSpPr>
@@ -916,16 +904,16 @@
           </a:lstStyle>
           <a:p>
             <a:r>
-              <a:rPr lang="fr-FR" smtClean="0"/>
-              <a:t>Modifiez le style du titre</a:t>
-            </a:r>
-            <a:endParaRPr lang="fr-FR"/>
-          </a:p>
-        </p:txBody>
-      </p:sp>
-      <p:sp>
-        <p:nvSpPr>
-          <p:cNvPr id="3" name="Espace réservé du texte 2"/>
+              <a:rPr lang="en-US" smtClean="0"/>
+              <a:t>Click to edit Master title style</a:t>
+            </a:r>
+            <a:endParaRPr lang="en-US"/>
+          </a:p>
+        </p:txBody>
+      </p:sp>
+      <p:sp>
+        <p:nvSpPr>
+          <p:cNvPr id="3" name="Text Placeholder 2"/>
           <p:cNvSpPr>
             <a:spLocks noGrp="1"/>
           </p:cNvSpPr>
@@ -1036,15 +1024,15 @@
           <a:p>
             <a:pPr lvl="0"/>
             <a:r>
-              <a:rPr lang="fr-FR" smtClean="0"/>
-              <a:t>Modifiez les styles du texte du masque</a:t>
-            </a:r>
-          </a:p>
-        </p:txBody>
-      </p:sp>
-      <p:sp>
-        <p:nvSpPr>
-          <p:cNvPr id="4" name="Espace réservé de la date 3"/>
+              <a:rPr lang="en-US" smtClean="0"/>
+              <a:t>Click to edit Master text styles</a:t>
+            </a:r>
+          </a:p>
+        </p:txBody>
+      </p:sp>
+      <p:sp>
+        <p:nvSpPr>
+          <p:cNvPr id="4" name="Date Placeholder 3"/>
           <p:cNvSpPr>
             <a:spLocks noGrp="1"/>
           </p:cNvSpPr>
@@ -1057,17 +1045,18 @@
           <a:bodyPr/>
           <a:lstStyle/>
           <a:p>
-            <a:fld id="{37C9372A-580F-4C71-95A0-1180FA684201}" type="datetimeFigureOut">
-              <a:rPr lang="fr-FR" smtClean="0"/>
-              <a:t>13/11/2012</a:t>
+            <a:fld id="{1D8BD707-D9CF-40AE-B4C6-C98DA3205C09}" type="datetimeFigureOut">
+              <a:rPr lang="en-US" smtClean="0"/>
+              <a:pPr/>
+              <a:t>8/1/2011</a:t>
             </a:fld>
-            <a:endParaRPr lang="fr-FR"/>
-          </a:p>
-        </p:txBody>
-      </p:sp>
-      <p:sp>
-        <p:nvSpPr>
-          <p:cNvPr id="5" name="Espace réservé du pied de page 4"/>
+            <a:endParaRPr lang="en-US"/>
+          </a:p>
+        </p:txBody>
+      </p:sp>
+      <p:sp>
+        <p:nvSpPr>
+          <p:cNvPr id="5" name="Footer Placeholder 4"/>
           <p:cNvSpPr>
             <a:spLocks noGrp="1"/>
           </p:cNvSpPr>
@@ -1080,13 +1069,13 @@
           <a:bodyPr/>
           <a:lstStyle/>
           <a:p>
-            <a:endParaRPr lang="fr-FR"/>
-          </a:p>
-        </p:txBody>
-      </p:sp>
-      <p:sp>
-        <p:nvSpPr>
-          <p:cNvPr id="6" name="Espace réservé du numéro de diapositive 5"/>
+            <a:endParaRPr lang="en-US"/>
+          </a:p>
+        </p:txBody>
+      </p:sp>
+      <p:sp>
+        <p:nvSpPr>
+          <p:cNvPr id="6" name="Slide Number Placeholder 5"/>
           <p:cNvSpPr>
             <a:spLocks noGrp="1"/>
           </p:cNvSpPr>
@@ -1099,20 +1088,16 @@
           <a:bodyPr/>
           <a:lstStyle/>
           <a:p>
-            <a:fld id="{2AEFD289-973E-4146-B99A-5687E204E7F9}" type="slidenum">
-              <a:rPr lang="fr-FR" smtClean="0"/>
-              <a:t>‹N°›</a:t>
+            <a:fld id="{B6F15528-21DE-4FAA-801E-634DDDAF4B2B}" type="slidenum">
+              <a:rPr lang="en-US" smtClean="0"/>
+              <a:pPr/>
+              <a:t>‹#›</a:t>
             </a:fld>
-            <a:endParaRPr lang="fr-FR"/>
+            <a:endParaRPr lang="en-US"/>
           </a:p>
         </p:txBody>
       </p:sp>
     </p:spTree>
-    <p:extLst>
-      <p:ext uri="{BB962C8B-B14F-4D97-AF65-F5344CB8AC3E}">
-        <p14:creationId xmlns:p14="http://schemas.microsoft.com/office/powerpoint/2010/main" val="4015059280"/>
-      </p:ext>
-    </p:extLst>
   </p:cSld>
   <p:clrMapOvr>
     <a:masterClrMapping/>
@@ -1122,7 +1107,7 @@
 
 <file path=ppt/slideLayouts/slideLayout4.xml><?xml version="1.0" encoding="utf-8"?>
 <p:sldLayout xmlns:a="http://schemas.openxmlformats.org/drawingml/2006/main" xmlns:r="http://schemas.openxmlformats.org/officeDocument/2006/relationships" xmlns:p="http://schemas.openxmlformats.org/presentationml/2006/main" type="twoObj" preserve="1">
-  <p:cSld name="Deux contenus">
+  <p:cSld name="Two Content">
     <p:spTree>
       <p:nvGrpSpPr>
         <p:cNvPr id="1" name=""/>
@@ -1139,7 +1124,7 @@
       </p:grpSpPr>
       <p:sp>
         <p:nvSpPr>
-          <p:cNvPr id="2" name="Titre 1"/>
+          <p:cNvPr id="2" name="Title 1"/>
           <p:cNvSpPr>
             <a:spLocks noGrp="1"/>
           </p:cNvSpPr>
@@ -1153,16 +1138,16 @@
           <a:lstStyle/>
           <a:p>
             <a:r>
-              <a:rPr lang="fr-FR" smtClean="0"/>
-              <a:t>Modifiez le style du titre</a:t>
-            </a:r>
-            <a:endParaRPr lang="fr-FR"/>
-          </a:p>
-        </p:txBody>
-      </p:sp>
-      <p:sp>
-        <p:nvSpPr>
-          <p:cNvPr id="3" name="Espace réservé du contenu 2"/>
+              <a:rPr lang="en-US" smtClean="0"/>
+              <a:t>Click to edit Master title style</a:t>
+            </a:r>
+            <a:endParaRPr lang="en-US"/>
+          </a:p>
+        </p:txBody>
+      </p:sp>
+      <p:sp>
+        <p:nvSpPr>
+          <p:cNvPr id="3" name="Content Placeholder 2"/>
           <p:cNvSpPr>
             <a:spLocks noGrp="1"/>
           </p:cNvSpPr>
@@ -1210,44 +1195,44 @@
           <a:p>
             <a:pPr lvl="0"/>
             <a:r>
-              <a:rPr lang="fr-FR" smtClean="0"/>
-              <a:t>Modifiez les styles du texte du masque</a:t>
+              <a:rPr lang="en-US" smtClean="0"/>
+              <a:t>Click to edit Master text styles</a:t>
             </a:r>
           </a:p>
           <a:p>
             <a:pPr lvl="1"/>
             <a:r>
-              <a:rPr lang="fr-FR" smtClean="0"/>
-              <a:t>Deuxième niveau</a:t>
+              <a:rPr lang="en-US" smtClean="0"/>
+              <a:t>Second level</a:t>
             </a:r>
           </a:p>
           <a:p>
             <a:pPr lvl="2"/>
             <a:r>
-              <a:rPr lang="fr-FR" smtClean="0"/>
-              <a:t>Troisième niveau</a:t>
+              <a:rPr lang="en-US" smtClean="0"/>
+              <a:t>Third level</a:t>
             </a:r>
           </a:p>
           <a:p>
             <a:pPr lvl="3"/>
             <a:r>
-              <a:rPr lang="fr-FR" smtClean="0"/>
-              <a:t>Quatrième niveau</a:t>
+              <a:rPr lang="en-US" smtClean="0"/>
+              <a:t>Fourth level</a:t>
             </a:r>
           </a:p>
           <a:p>
             <a:pPr lvl="4"/>
             <a:r>
-              <a:rPr lang="fr-FR" smtClean="0"/>
-              <a:t>Cinquième niveau</a:t>
-            </a:r>
-            <a:endParaRPr lang="fr-FR"/>
-          </a:p>
-        </p:txBody>
-      </p:sp>
-      <p:sp>
-        <p:nvSpPr>
-          <p:cNvPr id="4" name="Espace réservé du contenu 3"/>
+              <a:rPr lang="en-US" smtClean="0"/>
+              <a:t>Fifth level</a:t>
+            </a:r>
+            <a:endParaRPr lang="en-US"/>
+          </a:p>
+        </p:txBody>
+      </p:sp>
+      <p:sp>
+        <p:nvSpPr>
+          <p:cNvPr id="4" name="Content Placeholder 3"/>
           <p:cNvSpPr>
             <a:spLocks noGrp="1"/>
           </p:cNvSpPr>
@@ -1295,44 +1280,44 @@
           <a:p>
             <a:pPr lvl="0"/>
             <a:r>
-              <a:rPr lang="fr-FR" smtClean="0"/>
-              <a:t>Modifiez les styles du texte du masque</a:t>
+              <a:rPr lang="en-US" smtClean="0"/>
+              <a:t>Click to edit Master text styles</a:t>
             </a:r>
           </a:p>
           <a:p>
             <a:pPr lvl="1"/>
             <a:r>
-              <a:rPr lang="fr-FR" smtClean="0"/>
-              <a:t>Deuxième niveau</a:t>
+              <a:rPr lang="en-US" smtClean="0"/>
+              <a:t>Second level</a:t>
             </a:r>
           </a:p>
           <a:p>
             <a:pPr lvl="2"/>
             <a:r>
-              <a:rPr lang="fr-FR" smtClean="0"/>
-              <a:t>Troisième niveau</a:t>
+              <a:rPr lang="en-US" smtClean="0"/>
+              <a:t>Third level</a:t>
             </a:r>
           </a:p>
           <a:p>
             <a:pPr lvl="3"/>
             <a:r>
-              <a:rPr lang="fr-FR" smtClean="0"/>
-              <a:t>Quatrième niveau</a:t>
+              <a:rPr lang="en-US" smtClean="0"/>
+              <a:t>Fourth level</a:t>
             </a:r>
           </a:p>
           <a:p>
             <a:pPr lvl="4"/>
             <a:r>
-              <a:rPr lang="fr-FR" smtClean="0"/>
-              <a:t>Cinquième niveau</a:t>
-            </a:r>
-            <a:endParaRPr lang="fr-FR"/>
-          </a:p>
-        </p:txBody>
-      </p:sp>
-      <p:sp>
-        <p:nvSpPr>
-          <p:cNvPr id="5" name="Espace réservé de la date 4"/>
+              <a:rPr lang="en-US" smtClean="0"/>
+              <a:t>Fifth level</a:t>
+            </a:r>
+            <a:endParaRPr lang="en-US"/>
+          </a:p>
+        </p:txBody>
+      </p:sp>
+      <p:sp>
+        <p:nvSpPr>
+          <p:cNvPr id="5" name="Date Placeholder 4"/>
           <p:cNvSpPr>
             <a:spLocks noGrp="1"/>
           </p:cNvSpPr>
@@ -1345,17 +1330,18 @@
           <a:bodyPr/>
           <a:lstStyle/>
           <a:p>
-            <a:fld id="{37C9372A-580F-4C71-95A0-1180FA684201}" type="datetimeFigureOut">
-              <a:rPr lang="fr-FR" smtClean="0"/>
-              <a:t>13/11/2012</a:t>
+            <a:fld id="{1D8BD707-D9CF-40AE-B4C6-C98DA3205C09}" type="datetimeFigureOut">
+              <a:rPr lang="en-US" smtClean="0"/>
+              <a:pPr/>
+              <a:t>8/1/2011</a:t>
             </a:fld>
-            <a:endParaRPr lang="fr-FR"/>
-          </a:p>
-        </p:txBody>
-      </p:sp>
-      <p:sp>
-        <p:nvSpPr>
-          <p:cNvPr id="6" name="Espace réservé du pied de page 5"/>
+            <a:endParaRPr lang="en-US"/>
+          </a:p>
+        </p:txBody>
+      </p:sp>
+      <p:sp>
+        <p:nvSpPr>
+          <p:cNvPr id="6" name="Footer Placeholder 5"/>
           <p:cNvSpPr>
             <a:spLocks noGrp="1"/>
           </p:cNvSpPr>
@@ -1368,13 +1354,13 @@
           <a:bodyPr/>
           <a:lstStyle/>
           <a:p>
-            <a:endParaRPr lang="fr-FR"/>
-          </a:p>
-        </p:txBody>
-      </p:sp>
-      <p:sp>
-        <p:nvSpPr>
-          <p:cNvPr id="7" name="Espace réservé du numéro de diapositive 6"/>
+            <a:endParaRPr lang="en-US"/>
+          </a:p>
+        </p:txBody>
+      </p:sp>
+      <p:sp>
+        <p:nvSpPr>
+          <p:cNvPr id="7" name="Slide Number Placeholder 6"/>
           <p:cNvSpPr>
             <a:spLocks noGrp="1"/>
           </p:cNvSpPr>
@@ -1387,20 +1373,16 @@
           <a:bodyPr/>
           <a:lstStyle/>
           <a:p>
-            <a:fld id="{2AEFD289-973E-4146-B99A-5687E204E7F9}" type="slidenum">
-              <a:rPr lang="fr-FR" smtClean="0"/>
-              <a:t>‹N°›</a:t>
+            <a:fld id="{B6F15528-21DE-4FAA-801E-634DDDAF4B2B}" type="slidenum">
+              <a:rPr lang="en-US" smtClean="0"/>
+              <a:pPr/>
+              <a:t>‹#›</a:t>
             </a:fld>
-            <a:endParaRPr lang="fr-FR"/>
+            <a:endParaRPr lang="en-US"/>
           </a:p>
         </p:txBody>
       </p:sp>
     </p:spTree>
-    <p:extLst>
-      <p:ext uri="{BB962C8B-B14F-4D97-AF65-F5344CB8AC3E}">
-        <p14:creationId xmlns:p14="http://schemas.microsoft.com/office/powerpoint/2010/main" val="3056004863"/>
-      </p:ext>
-    </p:extLst>
   </p:cSld>
   <p:clrMapOvr>
     <a:masterClrMapping/>
@@ -1410,7 +1392,7 @@
 
 <file path=ppt/slideLayouts/slideLayout5.xml><?xml version="1.0" encoding="utf-8"?>
 <p:sldLayout xmlns:a="http://schemas.openxmlformats.org/drawingml/2006/main" xmlns:r="http://schemas.openxmlformats.org/officeDocument/2006/relationships" xmlns:p="http://schemas.openxmlformats.org/presentationml/2006/main" type="twoTxTwoObj" preserve="1">
-  <p:cSld name="Comparaison">
+  <p:cSld name="Comparison">
     <p:spTree>
       <p:nvGrpSpPr>
         <p:cNvPr id="1" name=""/>
@@ -1427,7 +1409,7 @@
       </p:grpSpPr>
       <p:sp>
         <p:nvSpPr>
-          <p:cNvPr id="2" name="Titre 1"/>
+          <p:cNvPr id="2" name="Title 1"/>
           <p:cNvSpPr>
             <a:spLocks noGrp="1"/>
           </p:cNvSpPr>
@@ -1445,16 +1427,16 @@
           </a:lstStyle>
           <a:p>
             <a:r>
-              <a:rPr lang="fr-FR" smtClean="0"/>
-              <a:t>Modifiez le style du titre</a:t>
-            </a:r>
-            <a:endParaRPr lang="fr-FR"/>
-          </a:p>
-        </p:txBody>
-      </p:sp>
-      <p:sp>
-        <p:nvSpPr>
-          <p:cNvPr id="3" name="Espace réservé du texte 2"/>
+              <a:rPr lang="en-US" smtClean="0"/>
+              <a:t>Click to edit Master title style</a:t>
+            </a:r>
+            <a:endParaRPr lang="en-US"/>
+          </a:p>
+        </p:txBody>
+      </p:sp>
+      <p:sp>
+        <p:nvSpPr>
+          <p:cNvPr id="3" name="Text Placeholder 2"/>
           <p:cNvSpPr>
             <a:spLocks noGrp="1"/>
           </p:cNvSpPr>
@@ -1511,15 +1493,15 @@
           <a:p>
             <a:pPr lvl="0"/>
             <a:r>
-              <a:rPr lang="fr-FR" smtClean="0"/>
-              <a:t>Modifiez les styles du texte du masque</a:t>
-            </a:r>
-          </a:p>
-        </p:txBody>
-      </p:sp>
-      <p:sp>
-        <p:nvSpPr>
-          <p:cNvPr id="4" name="Espace réservé du contenu 3"/>
+              <a:rPr lang="en-US" smtClean="0"/>
+              <a:t>Click to edit Master text styles</a:t>
+            </a:r>
+          </a:p>
+        </p:txBody>
+      </p:sp>
+      <p:sp>
+        <p:nvSpPr>
+          <p:cNvPr id="4" name="Content Placeholder 3"/>
           <p:cNvSpPr>
             <a:spLocks noGrp="1"/>
           </p:cNvSpPr>
@@ -1567,44 +1549,44 @@
           <a:p>
             <a:pPr lvl="0"/>
             <a:r>
-              <a:rPr lang="fr-FR" smtClean="0"/>
-              <a:t>Modifiez les styles du texte du masque</a:t>
+              <a:rPr lang="en-US" smtClean="0"/>
+              <a:t>Click to edit Master text styles</a:t>
             </a:r>
           </a:p>
           <a:p>
             <a:pPr lvl="1"/>
             <a:r>
-              <a:rPr lang="fr-FR" smtClean="0"/>
-              <a:t>Deuxième niveau</a:t>
+              <a:rPr lang="en-US" smtClean="0"/>
+              <a:t>Second level</a:t>
             </a:r>
           </a:p>
           <a:p>
             <a:pPr lvl="2"/>
             <a:r>
-              <a:rPr lang="fr-FR" smtClean="0"/>
-              <a:t>Troisième niveau</a:t>
+              <a:rPr lang="en-US" smtClean="0"/>
+              <a:t>Third level</a:t>
             </a:r>
           </a:p>
           <a:p>
             <a:pPr lvl="3"/>
             <a:r>
-              <a:rPr lang="fr-FR" smtClean="0"/>
-              <a:t>Quatrième niveau</a:t>
+              <a:rPr lang="en-US" smtClean="0"/>
+              <a:t>Fourth level</a:t>
             </a:r>
           </a:p>
           <a:p>
             <a:pPr lvl="4"/>
             <a:r>
-              <a:rPr lang="fr-FR" smtClean="0"/>
-              <a:t>Cinquième niveau</a:t>
-            </a:r>
-            <a:endParaRPr lang="fr-FR"/>
-          </a:p>
-        </p:txBody>
-      </p:sp>
-      <p:sp>
-        <p:nvSpPr>
-          <p:cNvPr id="5" name="Espace réservé du texte 4"/>
+              <a:rPr lang="en-US" smtClean="0"/>
+              <a:t>Fifth level</a:t>
+            </a:r>
+            <a:endParaRPr lang="en-US"/>
+          </a:p>
+        </p:txBody>
+      </p:sp>
+      <p:sp>
+        <p:nvSpPr>
+          <p:cNvPr id="5" name="Text Placeholder 4"/>
           <p:cNvSpPr>
             <a:spLocks noGrp="1"/>
           </p:cNvSpPr>
@@ -1661,15 +1643,15 @@
           <a:p>
             <a:pPr lvl="0"/>
             <a:r>
-              <a:rPr lang="fr-FR" smtClean="0"/>
-              <a:t>Modifiez les styles du texte du masque</a:t>
-            </a:r>
-          </a:p>
-        </p:txBody>
-      </p:sp>
-      <p:sp>
-        <p:nvSpPr>
-          <p:cNvPr id="6" name="Espace réservé du contenu 5"/>
+              <a:rPr lang="en-US" smtClean="0"/>
+              <a:t>Click to edit Master text styles</a:t>
+            </a:r>
+          </a:p>
+        </p:txBody>
+      </p:sp>
+      <p:sp>
+        <p:nvSpPr>
+          <p:cNvPr id="6" name="Content Placeholder 5"/>
           <p:cNvSpPr>
             <a:spLocks noGrp="1"/>
           </p:cNvSpPr>
@@ -1717,44 +1699,44 @@
           <a:p>
             <a:pPr lvl="0"/>
             <a:r>
-              <a:rPr lang="fr-FR" smtClean="0"/>
-              <a:t>Modifiez les styles du texte du masque</a:t>
+              <a:rPr lang="en-US" smtClean="0"/>
+              <a:t>Click to edit Master text styles</a:t>
             </a:r>
           </a:p>
           <a:p>
             <a:pPr lvl="1"/>
             <a:r>
-              <a:rPr lang="fr-FR" smtClean="0"/>
-              <a:t>Deuxième niveau</a:t>
+              <a:rPr lang="en-US" smtClean="0"/>
+              <a:t>Second level</a:t>
             </a:r>
           </a:p>
           <a:p>
             <a:pPr lvl="2"/>
             <a:r>
-              <a:rPr lang="fr-FR" smtClean="0"/>
-              <a:t>Troisième niveau</a:t>
+              <a:rPr lang="en-US" smtClean="0"/>
+              <a:t>Third level</a:t>
             </a:r>
           </a:p>
           <a:p>
             <a:pPr lvl="3"/>
             <a:r>
-              <a:rPr lang="fr-FR" smtClean="0"/>
-              <a:t>Quatrième niveau</a:t>
+              <a:rPr lang="en-US" smtClean="0"/>
+              <a:t>Fourth level</a:t>
             </a:r>
           </a:p>
           <a:p>
             <a:pPr lvl="4"/>
             <a:r>
-              <a:rPr lang="fr-FR" smtClean="0"/>
-              <a:t>Cinquième niveau</a:t>
-            </a:r>
-            <a:endParaRPr lang="fr-FR"/>
-          </a:p>
-        </p:txBody>
-      </p:sp>
-      <p:sp>
-        <p:nvSpPr>
-          <p:cNvPr id="7" name="Espace réservé de la date 6"/>
+              <a:rPr lang="en-US" smtClean="0"/>
+              <a:t>Fifth level</a:t>
+            </a:r>
+            <a:endParaRPr lang="en-US"/>
+          </a:p>
+        </p:txBody>
+      </p:sp>
+      <p:sp>
+        <p:nvSpPr>
+          <p:cNvPr id="7" name="Date Placeholder 6"/>
           <p:cNvSpPr>
             <a:spLocks noGrp="1"/>
           </p:cNvSpPr>
@@ -1767,17 +1749,18 @@
           <a:bodyPr/>
           <a:lstStyle/>
           <a:p>
-            <a:fld id="{37C9372A-580F-4C71-95A0-1180FA684201}" type="datetimeFigureOut">
-              <a:rPr lang="fr-FR" smtClean="0"/>
-              <a:t>13/11/2012</a:t>
+            <a:fld id="{1D8BD707-D9CF-40AE-B4C6-C98DA3205C09}" type="datetimeFigureOut">
+              <a:rPr lang="en-US" smtClean="0"/>
+              <a:pPr/>
+              <a:t>8/1/2011</a:t>
             </a:fld>
-            <a:endParaRPr lang="fr-FR"/>
-          </a:p>
-        </p:txBody>
-      </p:sp>
-      <p:sp>
-        <p:nvSpPr>
-          <p:cNvPr id="8" name="Espace réservé du pied de page 7"/>
+            <a:endParaRPr lang="en-US"/>
+          </a:p>
+        </p:txBody>
+      </p:sp>
+      <p:sp>
+        <p:nvSpPr>
+          <p:cNvPr id="8" name="Footer Placeholder 7"/>
           <p:cNvSpPr>
             <a:spLocks noGrp="1"/>
           </p:cNvSpPr>
@@ -1790,13 +1773,13 @@
           <a:bodyPr/>
           <a:lstStyle/>
           <a:p>
-            <a:endParaRPr lang="fr-FR"/>
-          </a:p>
-        </p:txBody>
-      </p:sp>
-      <p:sp>
-        <p:nvSpPr>
-          <p:cNvPr id="9" name="Espace réservé du numéro de diapositive 8"/>
+            <a:endParaRPr lang="en-US"/>
+          </a:p>
+        </p:txBody>
+      </p:sp>
+      <p:sp>
+        <p:nvSpPr>
+          <p:cNvPr id="9" name="Slide Number Placeholder 8"/>
           <p:cNvSpPr>
             <a:spLocks noGrp="1"/>
           </p:cNvSpPr>
@@ -1809,20 +1792,16 @@
           <a:bodyPr/>
           <a:lstStyle/>
           <a:p>
-            <a:fld id="{2AEFD289-973E-4146-B99A-5687E204E7F9}" type="slidenum">
-              <a:rPr lang="fr-FR" smtClean="0"/>
-              <a:t>‹N°›</a:t>
+            <a:fld id="{B6F15528-21DE-4FAA-801E-634DDDAF4B2B}" type="slidenum">
+              <a:rPr lang="en-US" smtClean="0"/>
+              <a:pPr/>
+              <a:t>‹#›</a:t>
             </a:fld>
-            <a:endParaRPr lang="fr-FR"/>
+            <a:endParaRPr lang="en-US"/>
           </a:p>
         </p:txBody>
       </p:sp>
     </p:spTree>
-    <p:extLst>
-      <p:ext uri="{BB962C8B-B14F-4D97-AF65-F5344CB8AC3E}">
-        <p14:creationId xmlns:p14="http://schemas.microsoft.com/office/powerpoint/2010/main" val="587488112"/>
-      </p:ext>
-    </p:extLst>
   </p:cSld>
   <p:clrMapOvr>
     <a:masterClrMapping/>
@@ -1832,7 +1811,7 @@
 
 <file path=ppt/slideLayouts/slideLayout6.xml><?xml version="1.0" encoding="utf-8"?>
 <p:sldLayout xmlns:a="http://schemas.openxmlformats.org/drawingml/2006/main" xmlns:r="http://schemas.openxmlformats.org/officeDocument/2006/relationships" xmlns:p="http://schemas.openxmlformats.org/presentationml/2006/main" type="titleOnly" preserve="1">
-  <p:cSld name="Titre seul">
+  <p:cSld name="Title Only">
     <p:spTree>
       <p:nvGrpSpPr>
         <p:cNvPr id="1" name=""/>
@@ -1849,7 +1828,7 @@
       </p:grpSpPr>
       <p:sp>
         <p:nvSpPr>
-          <p:cNvPr id="2" name="Titre 1"/>
+          <p:cNvPr id="2" name="Title 1"/>
           <p:cNvSpPr>
             <a:spLocks noGrp="1"/>
           </p:cNvSpPr>
@@ -1863,16 +1842,16 @@
           <a:lstStyle/>
           <a:p>
             <a:r>
-              <a:rPr lang="fr-FR" smtClean="0"/>
-              <a:t>Modifiez le style du titre</a:t>
-            </a:r>
-            <a:endParaRPr lang="fr-FR"/>
-          </a:p>
-        </p:txBody>
-      </p:sp>
-      <p:sp>
-        <p:nvSpPr>
-          <p:cNvPr id="3" name="Espace réservé de la date 2"/>
+              <a:rPr lang="en-US" smtClean="0"/>
+              <a:t>Click to edit Master title style</a:t>
+            </a:r>
+            <a:endParaRPr lang="en-US"/>
+          </a:p>
+        </p:txBody>
+      </p:sp>
+      <p:sp>
+        <p:nvSpPr>
+          <p:cNvPr id="3" name="Date Placeholder 2"/>
           <p:cNvSpPr>
             <a:spLocks noGrp="1"/>
           </p:cNvSpPr>
@@ -1885,17 +1864,18 @@
           <a:bodyPr/>
           <a:lstStyle/>
           <a:p>
-            <a:fld id="{37C9372A-580F-4C71-95A0-1180FA684201}" type="datetimeFigureOut">
-              <a:rPr lang="fr-FR" smtClean="0"/>
-              <a:t>13/11/2012</a:t>
+            <a:fld id="{1D8BD707-D9CF-40AE-B4C6-C98DA3205C09}" type="datetimeFigureOut">
+              <a:rPr lang="en-US" smtClean="0"/>
+              <a:pPr/>
+              <a:t>8/1/2011</a:t>
             </a:fld>
-            <a:endParaRPr lang="fr-FR"/>
-          </a:p>
-        </p:txBody>
-      </p:sp>
-      <p:sp>
-        <p:nvSpPr>
-          <p:cNvPr id="4" name="Espace réservé du pied de page 3"/>
+            <a:endParaRPr lang="en-US"/>
+          </a:p>
+        </p:txBody>
+      </p:sp>
+      <p:sp>
+        <p:nvSpPr>
+          <p:cNvPr id="4" name="Footer Placeholder 3"/>
           <p:cNvSpPr>
             <a:spLocks noGrp="1"/>
           </p:cNvSpPr>
@@ -1908,13 +1888,13 @@
           <a:bodyPr/>
           <a:lstStyle/>
           <a:p>
-            <a:endParaRPr lang="fr-FR"/>
-          </a:p>
-        </p:txBody>
-      </p:sp>
-      <p:sp>
-        <p:nvSpPr>
-          <p:cNvPr id="5" name="Espace réservé du numéro de diapositive 4"/>
+            <a:endParaRPr lang="en-US"/>
+          </a:p>
+        </p:txBody>
+      </p:sp>
+      <p:sp>
+        <p:nvSpPr>
+          <p:cNvPr id="5" name="Slide Number Placeholder 4"/>
           <p:cNvSpPr>
             <a:spLocks noGrp="1"/>
           </p:cNvSpPr>
@@ -1927,20 +1907,16 @@
           <a:bodyPr/>
           <a:lstStyle/>
           <a:p>
-            <a:fld id="{2AEFD289-973E-4146-B99A-5687E204E7F9}" type="slidenum">
-              <a:rPr lang="fr-FR" smtClean="0"/>
-              <a:t>‹N°›</a:t>
+            <a:fld id="{B6F15528-21DE-4FAA-801E-634DDDAF4B2B}" type="slidenum">
+              <a:rPr lang="en-US" smtClean="0"/>
+              <a:pPr/>
+              <a:t>‹#›</a:t>
             </a:fld>
-            <a:endParaRPr lang="fr-FR"/>
+            <a:endParaRPr lang="en-US"/>
           </a:p>
         </p:txBody>
       </p:sp>
     </p:spTree>
-    <p:extLst>
-      <p:ext uri="{BB962C8B-B14F-4D97-AF65-F5344CB8AC3E}">
-        <p14:creationId xmlns:p14="http://schemas.microsoft.com/office/powerpoint/2010/main" val="874003608"/>
-      </p:ext>
-    </p:extLst>
   </p:cSld>
   <p:clrMapOvr>
     <a:masterClrMapping/>
@@ -1950,7 +1926,7 @@
 
 <file path=ppt/slideLayouts/slideLayout7.xml><?xml version="1.0" encoding="utf-8"?>
 <p:sldLayout xmlns:a="http://schemas.openxmlformats.org/drawingml/2006/main" xmlns:r="http://schemas.openxmlformats.org/officeDocument/2006/relationships" xmlns:p="http://schemas.openxmlformats.org/presentationml/2006/main" type="blank" preserve="1">
-  <p:cSld name="Vide">
+  <p:cSld name="Blank">
     <p:spTree>
       <p:nvGrpSpPr>
         <p:cNvPr id="1" name=""/>
@@ -1967,7 +1943,7 @@
       </p:grpSpPr>
       <p:sp>
         <p:nvSpPr>
-          <p:cNvPr id="2" name="Espace réservé de la date 1"/>
+          <p:cNvPr id="2" name="Date Placeholder 1"/>
           <p:cNvSpPr>
             <a:spLocks noGrp="1"/>
           </p:cNvSpPr>
@@ -1980,17 +1956,18 @@
           <a:bodyPr/>
           <a:lstStyle/>
           <a:p>
-            <a:fld id="{37C9372A-580F-4C71-95A0-1180FA684201}" type="datetimeFigureOut">
-              <a:rPr lang="fr-FR" smtClean="0"/>
-              <a:t>13/11/2012</a:t>
+            <a:fld id="{1D8BD707-D9CF-40AE-B4C6-C98DA3205C09}" type="datetimeFigureOut">
+              <a:rPr lang="en-US" smtClean="0"/>
+              <a:pPr/>
+              <a:t>8/1/2011</a:t>
             </a:fld>
-            <a:endParaRPr lang="fr-FR"/>
-          </a:p>
-        </p:txBody>
-      </p:sp>
-      <p:sp>
-        <p:nvSpPr>
-          <p:cNvPr id="3" name="Espace réservé du pied de page 2"/>
+            <a:endParaRPr lang="en-US"/>
+          </a:p>
+        </p:txBody>
+      </p:sp>
+      <p:sp>
+        <p:nvSpPr>
+          <p:cNvPr id="3" name="Footer Placeholder 2"/>
           <p:cNvSpPr>
             <a:spLocks noGrp="1"/>
           </p:cNvSpPr>
@@ -2003,13 +1980,13 @@
           <a:bodyPr/>
           <a:lstStyle/>
           <a:p>
-            <a:endParaRPr lang="fr-FR"/>
-          </a:p>
-        </p:txBody>
-      </p:sp>
-      <p:sp>
-        <p:nvSpPr>
-          <p:cNvPr id="4" name="Espace réservé du numéro de diapositive 3"/>
+            <a:endParaRPr lang="en-US"/>
+          </a:p>
+        </p:txBody>
+      </p:sp>
+      <p:sp>
+        <p:nvSpPr>
+          <p:cNvPr id="4" name="Slide Number Placeholder 3"/>
           <p:cNvSpPr>
             <a:spLocks noGrp="1"/>
           </p:cNvSpPr>
@@ -2022,20 +1999,16 @@
           <a:bodyPr/>
           <a:lstStyle/>
           <a:p>
-            <a:fld id="{2AEFD289-973E-4146-B99A-5687E204E7F9}" type="slidenum">
-              <a:rPr lang="fr-FR" smtClean="0"/>
-              <a:t>‹N°›</a:t>
+            <a:fld id="{B6F15528-21DE-4FAA-801E-634DDDAF4B2B}" type="slidenum">
+              <a:rPr lang="en-US" smtClean="0"/>
+              <a:pPr/>
+              <a:t>‹#›</a:t>
             </a:fld>
-            <a:endParaRPr lang="fr-FR"/>
+            <a:endParaRPr lang="en-US"/>
           </a:p>
         </p:txBody>
       </p:sp>
     </p:spTree>
-    <p:extLst>
-      <p:ext uri="{BB962C8B-B14F-4D97-AF65-F5344CB8AC3E}">
-        <p14:creationId xmlns:p14="http://schemas.microsoft.com/office/powerpoint/2010/main" val="3535748813"/>
-      </p:ext>
-    </p:extLst>
   </p:cSld>
   <p:clrMapOvr>
     <a:masterClrMapping/>
@@ -2045,7 +2018,7 @@
 
 <file path=ppt/slideLayouts/slideLayout8.xml><?xml version="1.0" encoding="utf-8"?>
 <p:sldLayout xmlns:a="http://schemas.openxmlformats.org/drawingml/2006/main" xmlns:r="http://schemas.openxmlformats.org/officeDocument/2006/relationships" xmlns:p="http://schemas.openxmlformats.org/presentationml/2006/main" type="objTx" preserve="1">
-  <p:cSld name="Contenu avec légende">
+  <p:cSld name="Content with Caption">
     <p:spTree>
       <p:nvGrpSpPr>
         <p:cNvPr id="1" name=""/>
@@ -2062,7 +2035,7 @@
       </p:grpSpPr>
       <p:sp>
         <p:nvSpPr>
-          <p:cNvPr id="2" name="Titre 1"/>
+          <p:cNvPr id="2" name="Title 1"/>
           <p:cNvSpPr>
             <a:spLocks noGrp="1"/>
           </p:cNvSpPr>
@@ -2085,16 +2058,16 @@
           </a:lstStyle>
           <a:p>
             <a:r>
-              <a:rPr lang="fr-FR" smtClean="0"/>
-              <a:t>Modifiez le style du titre</a:t>
-            </a:r>
-            <a:endParaRPr lang="fr-FR"/>
-          </a:p>
-        </p:txBody>
-      </p:sp>
-      <p:sp>
-        <p:nvSpPr>
-          <p:cNvPr id="3" name="Espace réservé du contenu 2"/>
+              <a:rPr lang="en-US" smtClean="0"/>
+              <a:t>Click to edit Master title style</a:t>
+            </a:r>
+            <a:endParaRPr lang="en-US"/>
+          </a:p>
+        </p:txBody>
+      </p:sp>
+      <p:sp>
+        <p:nvSpPr>
+          <p:cNvPr id="3" name="Content Placeholder 2"/>
           <p:cNvSpPr>
             <a:spLocks noGrp="1"/>
           </p:cNvSpPr>
@@ -2142,44 +2115,44 @@
           <a:p>
             <a:pPr lvl="0"/>
             <a:r>
-              <a:rPr lang="fr-FR" smtClean="0"/>
-              <a:t>Modifiez les styles du texte du masque</a:t>
+              <a:rPr lang="en-US" smtClean="0"/>
+              <a:t>Click to edit Master text styles</a:t>
             </a:r>
           </a:p>
           <a:p>
             <a:pPr lvl="1"/>
             <a:r>
-              <a:rPr lang="fr-FR" smtClean="0"/>
-              <a:t>Deuxième niveau</a:t>
+              <a:rPr lang="en-US" smtClean="0"/>
+              <a:t>Second level</a:t>
             </a:r>
           </a:p>
           <a:p>
             <a:pPr lvl="2"/>
             <a:r>
-              <a:rPr lang="fr-FR" smtClean="0"/>
-              <a:t>Troisième niveau</a:t>
+              <a:rPr lang="en-US" smtClean="0"/>
+              <a:t>Third level</a:t>
             </a:r>
           </a:p>
           <a:p>
             <a:pPr lvl="3"/>
             <a:r>
-              <a:rPr lang="fr-FR" smtClean="0"/>
-              <a:t>Quatrième niveau</a:t>
+              <a:rPr lang="en-US" smtClean="0"/>
+              <a:t>Fourth level</a:t>
             </a:r>
           </a:p>
           <a:p>
             <a:pPr lvl="4"/>
             <a:r>
-              <a:rPr lang="fr-FR" smtClean="0"/>
-              <a:t>Cinquième niveau</a:t>
-            </a:r>
-            <a:endParaRPr lang="fr-FR"/>
-          </a:p>
-        </p:txBody>
-      </p:sp>
-      <p:sp>
-        <p:nvSpPr>
-          <p:cNvPr id="4" name="Espace réservé du texte 3"/>
+              <a:rPr lang="en-US" smtClean="0"/>
+              <a:t>Fifth level</a:t>
+            </a:r>
+            <a:endParaRPr lang="en-US"/>
+          </a:p>
+        </p:txBody>
+      </p:sp>
+      <p:sp>
+        <p:nvSpPr>
+          <p:cNvPr id="4" name="Text Placeholder 3"/>
           <p:cNvSpPr>
             <a:spLocks noGrp="1"/>
           </p:cNvSpPr>
@@ -2236,15 +2209,15 @@
           <a:p>
             <a:pPr lvl="0"/>
             <a:r>
-              <a:rPr lang="fr-FR" smtClean="0"/>
-              <a:t>Modifiez les styles du texte du masque</a:t>
-            </a:r>
-          </a:p>
-        </p:txBody>
-      </p:sp>
-      <p:sp>
-        <p:nvSpPr>
-          <p:cNvPr id="5" name="Espace réservé de la date 4"/>
+              <a:rPr lang="en-US" smtClean="0"/>
+              <a:t>Click to edit Master text styles</a:t>
+            </a:r>
+          </a:p>
+        </p:txBody>
+      </p:sp>
+      <p:sp>
+        <p:nvSpPr>
+          <p:cNvPr id="5" name="Date Placeholder 4"/>
           <p:cNvSpPr>
             <a:spLocks noGrp="1"/>
           </p:cNvSpPr>
@@ -2257,17 +2230,18 @@
           <a:bodyPr/>
           <a:lstStyle/>
           <a:p>
-            <a:fld id="{37C9372A-580F-4C71-95A0-1180FA684201}" type="datetimeFigureOut">
-              <a:rPr lang="fr-FR" smtClean="0"/>
-              <a:t>13/11/2012</a:t>
+            <a:fld id="{1D8BD707-D9CF-40AE-B4C6-C98DA3205C09}" type="datetimeFigureOut">
+              <a:rPr lang="en-US" smtClean="0"/>
+              <a:pPr/>
+              <a:t>8/1/2011</a:t>
             </a:fld>
-            <a:endParaRPr lang="fr-FR"/>
-          </a:p>
-        </p:txBody>
-      </p:sp>
-      <p:sp>
-        <p:nvSpPr>
-          <p:cNvPr id="6" name="Espace réservé du pied de page 5"/>
+            <a:endParaRPr lang="en-US"/>
+          </a:p>
+        </p:txBody>
+      </p:sp>
+      <p:sp>
+        <p:nvSpPr>
+          <p:cNvPr id="6" name="Footer Placeholder 5"/>
           <p:cNvSpPr>
             <a:spLocks noGrp="1"/>
           </p:cNvSpPr>
@@ -2280,13 +2254,13 @@
           <a:bodyPr/>
           <a:lstStyle/>
           <a:p>
-            <a:endParaRPr lang="fr-FR"/>
-          </a:p>
-        </p:txBody>
-      </p:sp>
-      <p:sp>
-        <p:nvSpPr>
-          <p:cNvPr id="7" name="Espace réservé du numéro de diapositive 6"/>
+            <a:endParaRPr lang="en-US"/>
+          </a:p>
+        </p:txBody>
+      </p:sp>
+      <p:sp>
+        <p:nvSpPr>
+          <p:cNvPr id="7" name="Slide Number Placeholder 6"/>
           <p:cNvSpPr>
             <a:spLocks noGrp="1"/>
           </p:cNvSpPr>
@@ -2299,20 +2273,16 @@
           <a:bodyPr/>
           <a:lstStyle/>
           <a:p>
-            <a:fld id="{2AEFD289-973E-4146-B99A-5687E204E7F9}" type="slidenum">
-              <a:rPr lang="fr-FR" smtClean="0"/>
-              <a:t>‹N°›</a:t>
+            <a:fld id="{B6F15528-21DE-4FAA-801E-634DDDAF4B2B}" type="slidenum">
+              <a:rPr lang="en-US" smtClean="0"/>
+              <a:pPr/>
+              <a:t>‹#›</a:t>
             </a:fld>
-            <a:endParaRPr lang="fr-FR"/>
+            <a:endParaRPr lang="en-US"/>
           </a:p>
         </p:txBody>
       </p:sp>
     </p:spTree>
-    <p:extLst>
-      <p:ext uri="{BB962C8B-B14F-4D97-AF65-F5344CB8AC3E}">
-        <p14:creationId xmlns:p14="http://schemas.microsoft.com/office/powerpoint/2010/main" val="350592917"/>
-      </p:ext>
-    </p:extLst>
   </p:cSld>
   <p:clrMapOvr>
     <a:masterClrMapping/>
@@ -2322,7 +2292,7 @@
 
 <file path=ppt/slideLayouts/slideLayout9.xml><?xml version="1.0" encoding="utf-8"?>
 <p:sldLayout xmlns:a="http://schemas.openxmlformats.org/drawingml/2006/main" xmlns:r="http://schemas.openxmlformats.org/officeDocument/2006/relationships" xmlns:p="http://schemas.openxmlformats.org/presentationml/2006/main" type="picTx" preserve="1">
-  <p:cSld name="Image avec légende">
+  <p:cSld name="Picture with Caption">
     <p:spTree>
       <p:nvGrpSpPr>
         <p:cNvPr id="1" name=""/>
@@ -2339,7 +2309,7 @@
       </p:grpSpPr>
       <p:sp>
         <p:nvSpPr>
-          <p:cNvPr id="2" name="Titre 1"/>
+          <p:cNvPr id="2" name="Title 1"/>
           <p:cNvSpPr>
             <a:spLocks noGrp="1"/>
           </p:cNvSpPr>
@@ -2362,16 +2332,16 @@
           </a:lstStyle>
           <a:p>
             <a:r>
-              <a:rPr lang="fr-FR" smtClean="0"/>
-              <a:t>Modifiez le style du titre</a:t>
-            </a:r>
-            <a:endParaRPr lang="fr-FR"/>
-          </a:p>
-        </p:txBody>
-      </p:sp>
-      <p:sp>
-        <p:nvSpPr>
-          <p:cNvPr id="3" name="Espace réservé pour une image  2"/>
+              <a:rPr lang="en-US" smtClean="0"/>
+              <a:t>Click to edit Master title style</a:t>
+            </a:r>
+            <a:endParaRPr lang="en-US"/>
+          </a:p>
+        </p:txBody>
+      </p:sp>
+      <p:sp>
+        <p:nvSpPr>
+          <p:cNvPr id="3" name="Picture Placeholder 2"/>
           <p:cNvSpPr>
             <a:spLocks noGrp="1"/>
           </p:cNvSpPr>
@@ -2426,13 +2396,13 @@
             </a:lvl9pPr>
           </a:lstStyle>
           <a:p>
-            <a:endParaRPr lang="fr-FR"/>
-          </a:p>
-        </p:txBody>
-      </p:sp>
-      <p:sp>
-        <p:nvSpPr>
-          <p:cNvPr id="4" name="Espace réservé du texte 3"/>
+            <a:endParaRPr lang="en-US"/>
+          </a:p>
+        </p:txBody>
+      </p:sp>
+      <p:sp>
+        <p:nvSpPr>
+          <p:cNvPr id="4" name="Text Placeholder 3"/>
           <p:cNvSpPr>
             <a:spLocks noGrp="1"/>
           </p:cNvSpPr>
@@ -2489,15 +2459,15 @@
           <a:p>
             <a:pPr lvl="0"/>
             <a:r>
-              <a:rPr lang="fr-FR" smtClean="0"/>
-              <a:t>Modifiez les styles du texte du masque</a:t>
-            </a:r>
-          </a:p>
-        </p:txBody>
-      </p:sp>
-      <p:sp>
-        <p:nvSpPr>
-          <p:cNvPr id="5" name="Espace réservé de la date 4"/>
+              <a:rPr lang="en-US" smtClean="0"/>
+              <a:t>Click to edit Master text styles</a:t>
+            </a:r>
+          </a:p>
+        </p:txBody>
+      </p:sp>
+      <p:sp>
+        <p:nvSpPr>
+          <p:cNvPr id="5" name="Date Placeholder 4"/>
           <p:cNvSpPr>
             <a:spLocks noGrp="1"/>
           </p:cNvSpPr>
@@ -2510,17 +2480,18 @@
           <a:bodyPr/>
           <a:lstStyle/>
           <a:p>
-            <a:fld id="{37C9372A-580F-4C71-95A0-1180FA684201}" type="datetimeFigureOut">
-              <a:rPr lang="fr-FR" smtClean="0"/>
-              <a:t>13/11/2012</a:t>
+            <a:fld id="{1D8BD707-D9CF-40AE-B4C6-C98DA3205C09}" type="datetimeFigureOut">
+              <a:rPr lang="en-US" smtClean="0"/>
+              <a:pPr/>
+              <a:t>8/1/2011</a:t>
             </a:fld>
-            <a:endParaRPr lang="fr-FR"/>
-          </a:p>
-        </p:txBody>
-      </p:sp>
-      <p:sp>
-        <p:nvSpPr>
-          <p:cNvPr id="6" name="Espace réservé du pied de page 5"/>
+            <a:endParaRPr lang="en-US"/>
+          </a:p>
+        </p:txBody>
+      </p:sp>
+      <p:sp>
+        <p:nvSpPr>
+          <p:cNvPr id="6" name="Footer Placeholder 5"/>
           <p:cNvSpPr>
             <a:spLocks noGrp="1"/>
           </p:cNvSpPr>
@@ -2533,13 +2504,13 @@
           <a:bodyPr/>
           <a:lstStyle/>
           <a:p>
-            <a:endParaRPr lang="fr-FR"/>
-          </a:p>
-        </p:txBody>
-      </p:sp>
-      <p:sp>
-        <p:nvSpPr>
-          <p:cNvPr id="7" name="Espace réservé du numéro de diapositive 6"/>
+            <a:endParaRPr lang="en-US"/>
+          </a:p>
+        </p:txBody>
+      </p:sp>
+      <p:sp>
+        <p:nvSpPr>
+          <p:cNvPr id="7" name="Slide Number Placeholder 6"/>
           <p:cNvSpPr>
             <a:spLocks noGrp="1"/>
           </p:cNvSpPr>
@@ -2552,20 +2523,16 @@
           <a:bodyPr/>
           <a:lstStyle/>
           <a:p>
-            <a:fld id="{2AEFD289-973E-4146-B99A-5687E204E7F9}" type="slidenum">
-              <a:rPr lang="fr-FR" smtClean="0"/>
-              <a:t>‹N°›</a:t>
+            <a:fld id="{B6F15528-21DE-4FAA-801E-634DDDAF4B2B}" type="slidenum">
+              <a:rPr lang="en-US" smtClean="0"/>
+              <a:pPr/>
+              <a:t>‹#›</a:t>
             </a:fld>
-            <a:endParaRPr lang="fr-FR"/>
+            <a:endParaRPr lang="en-US"/>
           </a:p>
         </p:txBody>
       </p:sp>
     </p:spTree>
-    <p:extLst>
-      <p:ext uri="{BB962C8B-B14F-4D97-AF65-F5344CB8AC3E}">
-        <p14:creationId xmlns:p14="http://schemas.microsoft.com/office/powerpoint/2010/main" val="2246802858"/>
-      </p:ext>
-    </p:extLst>
   </p:cSld>
   <p:clrMapOvr>
     <a:masterClrMapping/>
@@ -2597,7 +2564,7 @@
       </p:grpSpPr>
       <p:sp>
         <p:nvSpPr>
-          <p:cNvPr id="2" name="Espace réservé du titre 1"/>
+          <p:cNvPr id="2" name="Title Placeholder 1"/>
           <p:cNvSpPr>
             <a:spLocks noGrp="1"/>
           </p:cNvSpPr>
@@ -2621,16 +2588,16 @@
           <a:lstStyle/>
           <a:p>
             <a:r>
-              <a:rPr lang="fr-FR" smtClean="0"/>
-              <a:t>Modifiez le style du titre</a:t>
-            </a:r>
-            <a:endParaRPr lang="fr-FR"/>
-          </a:p>
-        </p:txBody>
-      </p:sp>
-      <p:sp>
-        <p:nvSpPr>
-          <p:cNvPr id="3" name="Espace réservé du texte 2"/>
+              <a:rPr lang="en-US" smtClean="0"/>
+              <a:t>Click to edit Master title style</a:t>
+            </a:r>
+            <a:endParaRPr lang="en-US"/>
+          </a:p>
+        </p:txBody>
+      </p:sp>
+      <p:sp>
+        <p:nvSpPr>
+          <p:cNvPr id="3" name="Text Placeholder 2"/>
           <p:cNvSpPr>
             <a:spLocks noGrp="1"/>
           </p:cNvSpPr>
@@ -2655,44 +2622,44 @@
           <a:p>
             <a:pPr lvl="0"/>
             <a:r>
-              <a:rPr lang="fr-FR" smtClean="0"/>
-              <a:t>Modifiez les styles du texte du masque</a:t>
+              <a:rPr lang="en-US" smtClean="0"/>
+              <a:t>Click to edit Master text styles</a:t>
             </a:r>
           </a:p>
           <a:p>
             <a:pPr lvl="1"/>
             <a:r>
-              <a:rPr lang="fr-FR" smtClean="0"/>
-              <a:t>Deuxième niveau</a:t>
+              <a:rPr lang="en-US" smtClean="0"/>
+              <a:t>Second level</a:t>
             </a:r>
           </a:p>
           <a:p>
             <a:pPr lvl="2"/>
             <a:r>
-              <a:rPr lang="fr-FR" smtClean="0"/>
-              <a:t>Troisième niveau</a:t>
+              <a:rPr lang="en-US" smtClean="0"/>
+              <a:t>Third level</a:t>
             </a:r>
           </a:p>
           <a:p>
             <a:pPr lvl="3"/>
             <a:r>
-              <a:rPr lang="fr-FR" smtClean="0"/>
-              <a:t>Quatrième niveau</a:t>
+              <a:rPr lang="en-US" smtClean="0"/>
+              <a:t>Fourth level</a:t>
             </a:r>
           </a:p>
           <a:p>
             <a:pPr lvl="4"/>
             <a:r>
-              <a:rPr lang="fr-FR" smtClean="0"/>
-              <a:t>Cinquième niveau</a:t>
-            </a:r>
-            <a:endParaRPr lang="fr-FR"/>
-          </a:p>
-        </p:txBody>
-      </p:sp>
-      <p:sp>
-        <p:nvSpPr>
-          <p:cNvPr id="4" name="Espace réservé de la date 3"/>
+              <a:rPr lang="en-US" smtClean="0"/>
+              <a:t>Fifth level</a:t>
+            </a:r>
+            <a:endParaRPr lang="en-US"/>
+          </a:p>
+        </p:txBody>
+      </p:sp>
+      <p:sp>
+        <p:nvSpPr>
+          <p:cNvPr id="4" name="Date Placeholder 3"/>
           <p:cNvSpPr>
             <a:spLocks noGrp="1"/>
           </p:cNvSpPr>
@@ -2723,17 +2690,18 @@
             </a:lvl1pPr>
           </a:lstStyle>
           <a:p>
-            <a:fld id="{37C9372A-580F-4C71-95A0-1180FA684201}" type="datetimeFigureOut">
-              <a:rPr lang="fr-FR" smtClean="0"/>
-              <a:t>13/11/2012</a:t>
+            <a:fld id="{1D8BD707-D9CF-40AE-B4C6-C98DA3205C09}" type="datetimeFigureOut">
+              <a:rPr lang="en-US" smtClean="0"/>
+              <a:pPr/>
+              <a:t>8/1/2011</a:t>
             </a:fld>
-            <a:endParaRPr lang="fr-FR"/>
-          </a:p>
-        </p:txBody>
-      </p:sp>
-      <p:sp>
-        <p:nvSpPr>
-          <p:cNvPr id="5" name="Espace réservé du pied de page 4"/>
+            <a:endParaRPr lang="en-US"/>
+          </a:p>
+        </p:txBody>
+      </p:sp>
+      <p:sp>
+        <p:nvSpPr>
+          <p:cNvPr id="5" name="Footer Placeholder 4"/>
           <p:cNvSpPr>
             <a:spLocks noGrp="1"/>
           </p:cNvSpPr>
@@ -2764,13 +2732,13 @@
             </a:lvl1pPr>
           </a:lstStyle>
           <a:p>
-            <a:endParaRPr lang="fr-FR"/>
-          </a:p>
-        </p:txBody>
-      </p:sp>
-      <p:sp>
-        <p:nvSpPr>
-          <p:cNvPr id="6" name="Espace réservé du numéro de diapositive 5"/>
+            <a:endParaRPr lang="en-US"/>
+          </a:p>
+        </p:txBody>
+      </p:sp>
+      <p:sp>
+        <p:nvSpPr>
+          <p:cNvPr id="6" name="Slide Number Placeholder 5"/>
           <p:cNvSpPr>
             <a:spLocks noGrp="1"/>
           </p:cNvSpPr>
@@ -2801,20 +2769,16 @@
             </a:lvl1pPr>
           </a:lstStyle>
           <a:p>
-            <a:fld id="{2AEFD289-973E-4146-B99A-5687E204E7F9}" type="slidenum">
-              <a:rPr lang="fr-FR" smtClean="0"/>
-              <a:t>‹N°›</a:t>
+            <a:fld id="{B6F15528-21DE-4FAA-801E-634DDDAF4B2B}" type="slidenum">
+              <a:rPr lang="en-US" smtClean="0"/>
+              <a:pPr/>
+              <a:t>‹#›</a:t>
             </a:fld>
-            <a:endParaRPr lang="fr-FR"/>
+            <a:endParaRPr lang="en-US"/>
           </a:p>
         </p:txBody>
       </p:sp>
     </p:spTree>
-    <p:extLst>
-      <p:ext uri="{BB962C8B-B14F-4D97-AF65-F5344CB8AC3E}">
-        <p14:creationId xmlns:p14="http://schemas.microsoft.com/office/powerpoint/2010/main" val="982926727"/>
-      </p:ext>
-    </p:extLst>
   </p:cSld>
   <p:clrMap bg1="lt1" tx1="dk1" bg2="lt2" tx2="dk2" accent1="accent1" accent2="accent2" accent3="accent3" accent4="accent4" accent5="accent5" accent6="accent6" hlink="hlink" folHlink="folHlink"/>
   <p:sldLayoutIdLst>
@@ -2986,7 +2950,7 @@
     </p:bodyStyle>
     <p:otherStyle>
       <a:defPPr>
-        <a:defRPr lang="fr-FR"/>
+        <a:defRPr lang="en-US"/>
       </a:defPPr>
       <a:lvl1pPr marL="0" algn="l" defTabSz="914400" rtl="0" eaLnBrk="1" latinLnBrk="0" hangingPunct="1">
         <a:defRPr sz="1800" kern="1200">
@@ -3084,7 +3048,7 @@
 </file>
 
 <file path=ppt/slides/slide1.xml><?xml version="1.0" encoding="utf-8"?>
-<p:sld xmlns:a="http://schemas.openxmlformats.org/drawingml/2006/main" xmlns:r="http://schemas.openxmlformats.org/officeDocument/2006/relationships" xmlns:p="http://schemas.openxmlformats.org/presentationml/2006/main">
+<p:sld xmlns:p="http://schemas.openxmlformats.org/presentationml/2006/main" xmlns:a="http://schemas.openxmlformats.org/drawingml/2006/main">
   <p:cSld>
     <p:spTree>
       <p:nvGrpSpPr>
@@ -3102,571 +3066,134 @@
       </p:grpSpPr>
       <p:sp>
         <p:nvSpPr>
-          <p:cNvPr id="4" name="Rectangle 1"/>
-          <p:cNvSpPr>
-            <a:spLocks noChangeArrowheads="1"/>
-          </p:cNvSpPr>
+          <p:cNvPr name="TextBox 2" id="2"/>
+          <p:cNvSpPr txBox="true"/>
           <p:nvPr/>
         </p:nvSpPr>
-        <p:spPr bwMode="auto">
+        <p:spPr>
           <a:xfrm>
-            <a:off x="107504" y="856254"/>
-            <a:ext cx="9036496" cy="5170646"/>
+            <a:off x="635000" y="127000"/>
+            <a:ext cx="10922000" cy="508000"/>
           </a:xfrm>
           <a:prstGeom prst="rect">
             <a:avLst/>
           </a:prstGeom>
-          <a:noFill/>
-          <a:ln>
-            <a:noFill/>
-          </a:ln>
-          <a:effectLst/>
-          <a:extLst>
-            <a:ext uri="{909E8E84-426E-40DD-AFC4-6F175D3DCCD1}">
-              <a14:hiddenFill xmlns:a14="http://schemas.microsoft.com/office/drawing/2010/main">
-                <a:solidFill>
-                  <a:schemeClr val="accent1"/>
-                </a:solidFill>
-              </a14:hiddenFill>
-            </a:ext>
-            <a:ext uri="{91240B29-F687-4F45-9708-019B960494DF}">
-              <a14:hiddenLine xmlns:a14="http://schemas.microsoft.com/office/drawing/2010/main" w="9525">
-                <a:solidFill>
-                  <a:schemeClr val="tx1"/>
-                </a:solidFill>
-                <a:miter lim="800000"/>
-                <a:headEnd/>
-                <a:tailEnd/>
-              </a14:hiddenLine>
-            </a:ext>
-            <a:ext uri="{AF507438-7753-43E0-B8FC-AC1667EBCBE1}">
-              <a14:hiddenEffects xmlns:a14="http://schemas.microsoft.com/office/drawing/2010/main">
-                <a:effectLst>
-                  <a:outerShdw dist="35921" dir="2700000" algn="ctr" rotWithShape="0">
-                    <a:schemeClr val="bg2"/>
-                  </a:outerShdw>
-                </a:effectLst>
-              </a14:hiddenEffects>
-            </a:ext>
-          </a:extLst>
         </p:spPr>
         <p:txBody>
-          <a:bodyPr vert="horz" wrap="square" lIns="91440" tIns="45720" rIns="91440" bIns="45720" numCol="1" anchor="ctr" anchorCtr="0" compatLnSpc="1">
-            <a:prstTxWarp prst="textNoShape">
-              <a:avLst/>
-            </a:prstTxWarp>
-            <a:spAutoFit/>
-          </a:bodyPr>
-          <a:lstStyle/>
-          <a:p>
-            <a:pPr marL="0" marR="0" lvl="0" indent="0" algn="ctr" defTabSz="914400" rtl="0" eaLnBrk="1" fontAlgn="base" latinLnBrk="0" hangingPunct="1">
-              <a:lnSpc>
-                <a:spcPct val="100000"/>
-              </a:lnSpc>
-              <a:spcBef>
-                <a:spcPct val="0"/>
-              </a:spcBef>
-              <a:spcAft>
-                <a:spcPct val="0"/>
-              </a:spcAft>
-              <a:buClrTx/>
-              <a:buSzTx/>
-              <a:buFontTx/>
-              <a:buNone/>
-              <a:tabLst/>
+          <a:bodyPr anchor="t" rtlCol="false"/>
+          <a:lstStyle/>
+          <a:p>
+            <a:pPr algn="l">
+              <a:defRPr/>
             </a:pPr>
             <a:r>
-              <a:rPr lang="en-GB" sz="6600" dirty="0" smtClean="0">
+              <a:rPr lang="fr-MG"/>
+              <a:t/>
+            </a:r>
+            <a:endParaRPr lang="en-US" sz="1100"/>
+          </a:p>
+          <a:p>
+            <a:pPr algn="ctr"/>
+            <a:r>
+              <a:rPr lang="en-US" sz="3200" b="true">
                 <a:solidFill>
                   <a:srgbClr val="0000FF"/>
                 </a:solidFill>
-                <a:latin typeface="Franklin Gothic Demi" pitchFamily="34" charset="0"/>
-                <a:cs typeface="Times New Roman" pitchFamily="18" charset="0"/>
+                <a:latin typeface="Verdana"/>
               </a:rPr>
-              <a:t>FF 49</a:t>
-            </a:r>
-            <a:endParaRPr kumimoji="0" lang="en-GB" sz="6600" b="0" i="0" u="none" strike="noStrike" cap="none" normalizeH="0" baseline="0" dirty="0" smtClean="0">
-              <a:ln>
-                <a:noFill/>
-              </a:ln>
-              <a:solidFill>
-                <a:srgbClr val="0000FF"/>
-              </a:solidFill>
-              <a:effectLst/>
-              <a:latin typeface="Franklin Gothic Demi" pitchFamily="34" charset="0"/>
-              <a:cs typeface="Times New Roman" pitchFamily="18" charset="0"/>
-            </a:endParaRPr>
-          </a:p>
-          <a:p>
-            <a:pPr marL="0" marR="0" lvl="0" indent="0" algn="ctr" defTabSz="914400" rtl="0" eaLnBrk="1" fontAlgn="base" latinLnBrk="0" hangingPunct="1">
-              <a:lnSpc>
-                <a:spcPct val="100000"/>
-              </a:lnSpc>
-              <a:spcBef>
-                <a:spcPct val="0"/>
-              </a:spcBef>
-              <a:spcAft>
-                <a:spcPct val="0"/>
-              </a:spcAft>
-              <a:buClrTx/>
-              <a:buSzTx/>
-              <a:buFontTx/>
-              <a:buNone/>
-              <a:tabLst/>
+              <a:t>HIRA 49</a:t>
+            </a:r>
+          </a:p>
+        </p:txBody>
+      </p:sp>
+      <p:sp>
+        <p:nvSpPr>
+          <p:cNvPr name="TextBox 3" id="3"/>
+          <p:cNvSpPr txBox="true"/>
+          <p:nvPr/>
+        </p:nvSpPr>
+        <p:spPr>
+          <a:xfrm>
+            <a:off x="635000" y="762000"/>
+            <a:ext cx="10922000" cy="5588000"/>
+          </a:xfrm>
+          <a:prstGeom prst="rect">
+            <a:avLst/>
+          </a:prstGeom>
+        </p:spPr>
+        <p:txBody>
+          <a:bodyPr anchor="t" rtlCol="false"/>
+          <a:lstStyle/>
+          <a:p>
+            <a:pPr algn="l">
+              <a:defRPr/>
             </a:pPr>
             <a:r>
-              <a:rPr kumimoji="0" lang="en-GB" sz="6600" b="0" i="0" u="none" strike="noStrike" cap="none" normalizeH="0" baseline="0" dirty="0" smtClean="0">
-                <a:ln>
-                  <a:noFill/>
-                </a:ln>
+              <a:rPr lang="fr-MG"/>
+              <a:t/>
+            </a:r>
+            <a:endParaRPr lang="en-US" sz="1100"/>
+          </a:p>
+          <a:p>
+            <a:pPr algn="ctr"/>
+            <a:r>
+              <a:rPr lang="en-US" sz="4500" b="true">
                 <a:solidFill>
                   <a:srgbClr val="0000FF"/>
                 </a:solidFill>
-                <a:effectLst/>
-                <a:latin typeface="Franklin Gothic Demi" pitchFamily="34" charset="0"/>
-                <a:cs typeface="Times New Roman" pitchFamily="18" charset="0"/>
+                <a:latin typeface="Verdana"/>
               </a:rPr>
-              <a:t>1-</a:t>
-            </a:r>
-            <a:r>
-              <a:rPr kumimoji="0" lang="en-GB" sz="6600" b="0" i="0" u="none" strike="noStrike" cap="none" normalizeH="0" baseline="0" dirty="0" smtClean="0">
-                <a:ln>
-                  <a:noFill/>
-                </a:ln>
-                <a:solidFill>
-                  <a:schemeClr val="tx1"/>
-                </a:solidFill>
-                <a:effectLst/>
-                <a:latin typeface="Franklin Gothic Demi" pitchFamily="34" charset="0"/>
-                <a:cs typeface="Times New Roman" pitchFamily="18" charset="0"/>
+              <a:t>1- </a:t>
+            </a:r>
+            <a:r>
+              <a:rPr lang="en-US" sz="4500" b="true">
+                <a:solidFill>
+                  <a:srgbClr val="000000"/>
+                </a:solidFill>
+                <a:latin typeface="Verdana"/>
               </a:rPr>
-              <a:t> </a:t>
-            </a:r>
-            <a:r>
-              <a:rPr kumimoji="0" lang="en-GB" sz="6600" b="0" i="0" u="none" strike="noStrike" cap="none" normalizeH="0" baseline="0" dirty="0" err="1" smtClean="0">
-                <a:ln>
-                  <a:noFill/>
-                </a:ln>
-                <a:solidFill>
-                  <a:schemeClr val="tx1"/>
-                </a:solidFill>
-                <a:effectLst/>
-                <a:latin typeface="Franklin Gothic Demi" pitchFamily="34" charset="0"/>
-                <a:cs typeface="Times New Roman" pitchFamily="18" charset="0"/>
+              <a:t>Mifona re ry Ray</a:t>
+            </a:r>
+          </a:p>
+          <a:p>
+            <a:pPr algn="ctr"/>
+            <a:r>
+              <a:rPr lang="en-US" sz="4500" b="true">
+                <a:solidFill>
+                  <a:srgbClr val="000000"/>
+                </a:solidFill>
+                <a:latin typeface="Verdana"/>
               </a:rPr>
-              <a:t>Mifona</a:t>
-            </a:r>
-            <a:r>
-              <a:rPr kumimoji="0" lang="en-GB" sz="6600" b="0" i="0" u="none" strike="noStrike" cap="none" normalizeH="0" baseline="0" dirty="0" smtClean="0">
-                <a:ln>
-                  <a:noFill/>
-                </a:ln>
-                <a:solidFill>
-                  <a:schemeClr val="tx1"/>
-                </a:solidFill>
-                <a:effectLst/>
-                <a:latin typeface="Franklin Gothic Demi" pitchFamily="34" charset="0"/>
-                <a:cs typeface="Times New Roman" pitchFamily="18" charset="0"/>
+              <a:t>Ireto Zanakao</a:t>
+            </a:r>
+          </a:p>
+          <a:p>
+            <a:pPr algn="ctr"/>
+            <a:r>
+              <a:rPr lang="en-US" sz="4500" b="true">
+                <a:solidFill>
+                  <a:srgbClr val="000000"/>
+                </a:solidFill>
+                <a:latin typeface="Verdana"/>
               </a:rPr>
-              <a:t> re </a:t>
-            </a:r>
-            <a:r>
-              <a:rPr kumimoji="0" lang="en-GB" sz="6600" b="0" i="0" u="none" strike="noStrike" cap="none" normalizeH="0" baseline="0" dirty="0" err="1" smtClean="0">
-                <a:ln>
-                  <a:noFill/>
-                </a:ln>
-                <a:solidFill>
-                  <a:schemeClr val="tx1"/>
-                </a:solidFill>
-                <a:effectLst/>
-                <a:latin typeface="Franklin Gothic Demi" pitchFamily="34" charset="0"/>
-                <a:cs typeface="Times New Roman" pitchFamily="18" charset="0"/>
+              <a:t>Fa diso izahay</a:t>
+            </a:r>
+          </a:p>
+          <a:p>
+            <a:pPr algn="ctr"/>
+            <a:r>
+              <a:rPr lang="en-US" sz="4500" b="true">
+                <a:solidFill>
+                  <a:srgbClr val="000000"/>
+                </a:solidFill>
+                <a:latin typeface="Verdana"/>
               </a:rPr>
-              <a:t>ry</a:t>
-            </a:r>
-            <a:r>
-              <a:rPr kumimoji="0" lang="en-GB" sz="6600" b="0" i="0" u="none" strike="noStrike" cap="none" normalizeH="0" baseline="0" dirty="0" smtClean="0">
-                <a:ln>
-                  <a:noFill/>
-                </a:ln>
-                <a:solidFill>
-                  <a:schemeClr val="tx1"/>
-                </a:solidFill>
-                <a:effectLst/>
-                <a:latin typeface="Franklin Gothic Demi" pitchFamily="34" charset="0"/>
-                <a:cs typeface="Times New Roman" pitchFamily="18" charset="0"/>
-              </a:rPr>
-              <a:t> Ray</a:t>
-            </a:r>
-            <a:endParaRPr kumimoji="0" lang="en-GB" sz="6600" b="0" i="0" u="none" strike="noStrike" cap="none" normalizeH="0" baseline="0" dirty="0" smtClean="0">
-              <a:ln>
-                <a:noFill/>
-              </a:ln>
-              <a:solidFill>
-                <a:schemeClr val="tx1"/>
-              </a:solidFill>
-              <a:effectLst/>
-              <a:latin typeface="Franklin Gothic Demi" pitchFamily="34" charset="0"/>
-            </a:endParaRPr>
-          </a:p>
-          <a:p>
-            <a:pPr marL="0" marR="0" lvl="0" indent="0" algn="ctr" defTabSz="914400" rtl="0" eaLnBrk="0" fontAlgn="base" latinLnBrk="0" hangingPunct="0">
-              <a:lnSpc>
-                <a:spcPct val="100000"/>
-              </a:lnSpc>
-              <a:spcBef>
-                <a:spcPct val="0"/>
-              </a:spcBef>
-              <a:spcAft>
-                <a:spcPct val="0"/>
-              </a:spcAft>
-              <a:buClrTx/>
-              <a:buSzTx/>
-              <a:buFontTx/>
-              <a:buNone/>
-              <a:tabLst/>
-            </a:pPr>
-            <a:r>
-              <a:rPr kumimoji="0" lang="en-GB" sz="6600" b="0" i="0" u="none" strike="noStrike" cap="none" normalizeH="0" baseline="0" dirty="0" smtClean="0">
-                <a:ln>
-                  <a:noFill/>
-                </a:ln>
-                <a:solidFill>
-                  <a:schemeClr val="tx1"/>
-                </a:solidFill>
-                <a:effectLst/>
-                <a:latin typeface="Franklin Gothic Demi" pitchFamily="34" charset="0"/>
-                <a:cs typeface="Times New Roman" pitchFamily="18" charset="0"/>
-              </a:rPr>
-              <a:t>   </a:t>
-            </a:r>
-            <a:r>
-              <a:rPr kumimoji="0" lang="en-GB" sz="6600" b="0" i="0" u="none" strike="noStrike" cap="none" normalizeH="0" baseline="0" dirty="0" err="1" smtClean="0">
-                <a:ln>
-                  <a:noFill/>
-                </a:ln>
-                <a:solidFill>
-                  <a:schemeClr val="tx1"/>
-                </a:solidFill>
-                <a:effectLst/>
-                <a:latin typeface="Franklin Gothic Demi" pitchFamily="34" charset="0"/>
-                <a:cs typeface="Times New Roman" pitchFamily="18" charset="0"/>
-              </a:rPr>
-              <a:t>Ireto</a:t>
-            </a:r>
-            <a:r>
-              <a:rPr kumimoji="0" lang="en-GB" sz="6600" b="0" i="0" u="none" strike="noStrike" cap="none" normalizeH="0" baseline="0" dirty="0" smtClean="0">
-                <a:ln>
-                  <a:noFill/>
-                </a:ln>
-                <a:solidFill>
-                  <a:schemeClr val="tx1"/>
-                </a:solidFill>
-                <a:effectLst/>
-                <a:latin typeface="Franklin Gothic Demi" pitchFamily="34" charset="0"/>
-                <a:cs typeface="Times New Roman" pitchFamily="18" charset="0"/>
-              </a:rPr>
-              <a:t> </a:t>
-            </a:r>
-            <a:r>
-              <a:rPr kumimoji="0" lang="en-GB" sz="6600" b="0" i="0" u="none" strike="noStrike" cap="none" normalizeH="0" baseline="0" dirty="0" err="1" smtClean="0">
-                <a:ln>
-                  <a:noFill/>
-                </a:ln>
-                <a:solidFill>
-                  <a:schemeClr val="tx1"/>
-                </a:solidFill>
-                <a:effectLst/>
-                <a:latin typeface="Franklin Gothic Demi" pitchFamily="34" charset="0"/>
-                <a:cs typeface="Times New Roman" pitchFamily="18" charset="0"/>
-              </a:rPr>
-              <a:t>Zanakao</a:t>
-            </a:r>
-            <a:endParaRPr kumimoji="0" lang="en-GB" sz="6600" b="0" i="0" u="none" strike="noStrike" cap="none" normalizeH="0" baseline="0" dirty="0" smtClean="0">
-              <a:ln>
-                <a:noFill/>
-              </a:ln>
-              <a:solidFill>
-                <a:schemeClr val="tx1"/>
-              </a:solidFill>
-              <a:effectLst/>
-              <a:latin typeface="Franklin Gothic Demi" pitchFamily="34" charset="0"/>
-            </a:endParaRPr>
-          </a:p>
-          <a:p>
-            <a:pPr marL="0" marR="0" lvl="0" indent="0" algn="ctr" defTabSz="914400" rtl="0" eaLnBrk="0" fontAlgn="base" latinLnBrk="0" hangingPunct="0">
-              <a:lnSpc>
-                <a:spcPct val="100000"/>
-              </a:lnSpc>
-              <a:spcBef>
-                <a:spcPct val="0"/>
-              </a:spcBef>
-              <a:spcAft>
-                <a:spcPct val="0"/>
-              </a:spcAft>
-              <a:buClrTx/>
-              <a:buSzTx/>
-              <a:buFontTx/>
-              <a:buNone/>
-              <a:tabLst/>
-            </a:pPr>
-            <a:r>
-              <a:rPr kumimoji="0" lang="en-GB" sz="6600" b="0" i="0" u="none" strike="noStrike" cap="none" normalizeH="0" baseline="0" dirty="0" smtClean="0">
-                <a:ln>
-                  <a:noFill/>
-                </a:ln>
-                <a:solidFill>
-                  <a:schemeClr val="tx1"/>
-                </a:solidFill>
-                <a:effectLst/>
-                <a:latin typeface="Franklin Gothic Demi" pitchFamily="34" charset="0"/>
-                <a:cs typeface="Times New Roman" pitchFamily="18" charset="0"/>
-              </a:rPr>
-              <a:t>   </a:t>
-            </a:r>
-            <a:r>
-              <a:rPr kumimoji="0" lang="en-GB" sz="6600" b="0" i="0" u="none" strike="noStrike" cap="none" normalizeH="0" baseline="0" dirty="0" err="1" smtClean="0">
-                <a:ln>
-                  <a:noFill/>
-                </a:ln>
-                <a:solidFill>
-                  <a:schemeClr val="tx1"/>
-                </a:solidFill>
-                <a:effectLst/>
-                <a:latin typeface="Franklin Gothic Demi" pitchFamily="34" charset="0"/>
-                <a:cs typeface="Times New Roman" pitchFamily="18" charset="0"/>
-              </a:rPr>
-              <a:t>Fa</a:t>
-            </a:r>
-            <a:r>
-              <a:rPr kumimoji="0" lang="en-GB" sz="6600" b="0" i="0" u="none" strike="noStrike" cap="none" normalizeH="0" baseline="0" dirty="0" smtClean="0">
-                <a:ln>
-                  <a:noFill/>
-                </a:ln>
-                <a:solidFill>
-                  <a:schemeClr val="tx1"/>
-                </a:solidFill>
-                <a:effectLst/>
-                <a:latin typeface="Franklin Gothic Demi" pitchFamily="34" charset="0"/>
-                <a:cs typeface="Times New Roman" pitchFamily="18" charset="0"/>
-              </a:rPr>
-              <a:t> </a:t>
-            </a:r>
-            <a:r>
-              <a:rPr kumimoji="0" lang="en-GB" sz="6600" b="0" i="0" u="none" strike="noStrike" cap="none" normalizeH="0" baseline="0" dirty="0" err="1" smtClean="0">
-                <a:ln>
-                  <a:noFill/>
-                </a:ln>
-                <a:solidFill>
-                  <a:schemeClr val="tx1"/>
-                </a:solidFill>
-                <a:effectLst/>
-                <a:latin typeface="Franklin Gothic Demi" pitchFamily="34" charset="0"/>
-                <a:cs typeface="Times New Roman" pitchFamily="18" charset="0"/>
-              </a:rPr>
-              <a:t>diso</a:t>
-            </a:r>
-            <a:r>
-              <a:rPr kumimoji="0" lang="en-GB" sz="6600" b="0" i="0" u="none" strike="noStrike" cap="none" normalizeH="0" baseline="0" dirty="0" smtClean="0">
-                <a:ln>
-                  <a:noFill/>
-                </a:ln>
-                <a:solidFill>
-                  <a:schemeClr val="tx1"/>
-                </a:solidFill>
-                <a:effectLst/>
-                <a:latin typeface="Franklin Gothic Demi" pitchFamily="34" charset="0"/>
-                <a:cs typeface="Times New Roman" pitchFamily="18" charset="0"/>
-              </a:rPr>
-              <a:t> </a:t>
-            </a:r>
-            <a:r>
-              <a:rPr kumimoji="0" lang="en-GB" sz="6600" b="0" i="0" u="none" strike="noStrike" cap="none" normalizeH="0" baseline="0" dirty="0" err="1" smtClean="0">
-                <a:ln>
-                  <a:noFill/>
-                </a:ln>
-                <a:solidFill>
-                  <a:schemeClr val="tx1"/>
-                </a:solidFill>
-                <a:effectLst/>
-                <a:latin typeface="Franklin Gothic Demi" pitchFamily="34" charset="0"/>
-                <a:cs typeface="Times New Roman" pitchFamily="18" charset="0"/>
-              </a:rPr>
-              <a:t>izahay</a:t>
-            </a:r>
-            <a:endParaRPr kumimoji="0" lang="en-GB" sz="6600" b="0" i="0" u="none" strike="noStrike" cap="none" normalizeH="0" baseline="0" dirty="0" smtClean="0">
-              <a:ln>
-                <a:noFill/>
-              </a:ln>
-              <a:solidFill>
-                <a:schemeClr val="tx1"/>
-              </a:solidFill>
-              <a:effectLst/>
-              <a:latin typeface="Franklin Gothic Demi" pitchFamily="34" charset="0"/>
-            </a:endParaRPr>
-          </a:p>
-          <a:p>
-            <a:pPr marL="0" marR="0" lvl="0" indent="0" algn="ctr" defTabSz="914400" rtl="0" eaLnBrk="0" fontAlgn="base" latinLnBrk="0" hangingPunct="0">
-              <a:lnSpc>
-                <a:spcPct val="100000"/>
-              </a:lnSpc>
-              <a:spcBef>
-                <a:spcPct val="0"/>
-              </a:spcBef>
-              <a:spcAft>
-                <a:spcPct val="0"/>
-              </a:spcAft>
-              <a:buClrTx/>
-              <a:buSzTx/>
-              <a:buFontTx/>
-              <a:buNone/>
-              <a:tabLst/>
-            </a:pPr>
-            <a:r>
-              <a:rPr kumimoji="0" lang="en-GB" sz="6600" b="0" i="0" u="none" strike="noStrike" cap="none" normalizeH="0" baseline="0" dirty="0" smtClean="0">
-                <a:ln>
-                  <a:noFill/>
-                </a:ln>
-                <a:solidFill>
-                  <a:schemeClr val="tx1"/>
-                </a:solidFill>
-                <a:effectLst/>
-                <a:latin typeface="Franklin Gothic Demi" pitchFamily="34" charset="0"/>
-                <a:cs typeface="Times New Roman" pitchFamily="18" charset="0"/>
-              </a:rPr>
-              <a:t>   </a:t>
-            </a:r>
-            <a:r>
-              <a:rPr kumimoji="0" lang="en-GB" sz="6600" b="0" i="0" u="none" strike="noStrike" cap="none" normalizeH="0" baseline="0" dirty="0" err="1" smtClean="0">
-                <a:ln>
-                  <a:noFill/>
-                </a:ln>
-                <a:solidFill>
-                  <a:schemeClr val="tx1"/>
-                </a:solidFill>
-                <a:effectLst/>
-                <a:latin typeface="Franklin Gothic Demi" pitchFamily="34" charset="0"/>
-                <a:cs typeface="Times New Roman" pitchFamily="18" charset="0"/>
-              </a:rPr>
-              <a:t>Tsy</a:t>
-            </a:r>
-            <a:r>
-              <a:rPr kumimoji="0" lang="en-GB" sz="6600" b="0" i="0" u="none" strike="noStrike" cap="none" normalizeH="0" baseline="0" dirty="0" smtClean="0">
-                <a:ln>
-                  <a:noFill/>
-                </a:ln>
-                <a:solidFill>
-                  <a:schemeClr val="tx1"/>
-                </a:solidFill>
-                <a:effectLst/>
-                <a:latin typeface="Franklin Gothic Demi" pitchFamily="34" charset="0"/>
-                <a:cs typeface="Times New Roman" pitchFamily="18" charset="0"/>
-              </a:rPr>
-              <a:t> </a:t>
-            </a:r>
-            <a:r>
-              <a:rPr kumimoji="0" lang="en-GB" sz="6600" b="0" i="0" u="none" strike="noStrike" cap="none" normalizeH="0" baseline="0" dirty="0" err="1" smtClean="0">
-                <a:ln>
-                  <a:noFill/>
-                </a:ln>
-                <a:solidFill>
-                  <a:schemeClr val="tx1"/>
-                </a:solidFill>
-                <a:effectLst/>
-                <a:latin typeface="Franklin Gothic Demi" pitchFamily="34" charset="0"/>
-                <a:cs typeface="Times New Roman" pitchFamily="18" charset="0"/>
-              </a:rPr>
-              <a:t>mety</a:t>
-            </a:r>
-            <a:r>
-              <a:rPr kumimoji="0" lang="en-GB" sz="6600" b="0" i="0" u="none" strike="noStrike" cap="none" normalizeH="0" baseline="0" dirty="0" smtClean="0">
-                <a:ln>
-                  <a:noFill/>
-                </a:ln>
-                <a:solidFill>
-                  <a:schemeClr val="tx1"/>
-                </a:solidFill>
-                <a:effectLst/>
-                <a:latin typeface="Franklin Gothic Demi" pitchFamily="34" charset="0"/>
-                <a:cs typeface="Times New Roman" pitchFamily="18" charset="0"/>
-              </a:rPr>
-              <a:t> </a:t>
-            </a:r>
-            <a:r>
-              <a:rPr kumimoji="0" lang="en-GB" sz="6600" b="0" i="0" u="none" strike="noStrike" cap="none" normalizeH="0" baseline="0" dirty="0" err="1" smtClean="0">
-                <a:ln>
-                  <a:noFill/>
-                </a:ln>
-                <a:solidFill>
-                  <a:schemeClr val="tx1"/>
-                </a:solidFill>
-                <a:effectLst/>
-                <a:latin typeface="Franklin Gothic Demi" pitchFamily="34" charset="0"/>
-                <a:cs typeface="Times New Roman" pitchFamily="18" charset="0"/>
-              </a:rPr>
-              <a:t>ny</a:t>
-            </a:r>
-            <a:r>
-              <a:rPr kumimoji="0" lang="en-GB" sz="6600" b="0" i="0" u="none" strike="noStrike" cap="none" normalizeH="0" baseline="0" dirty="0" smtClean="0">
-                <a:ln>
-                  <a:noFill/>
-                </a:ln>
-                <a:solidFill>
-                  <a:schemeClr val="tx1"/>
-                </a:solidFill>
-                <a:effectLst/>
-                <a:latin typeface="Franklin Gothic Demi" pitchFamily="34" charset="0"/>
-                <a:cs typeface="Times New Roman" pitchFamily="18" charset="0"/>
-              </a:rPr>
-              <a:t> </a:t>
-            </a:r>
-            <a:r>
-              <a:rPr kumimoji="0" lang="en-GB" sz="6600" b="0" i="0" u="none" strike="noStrike" cap="none" normalizeH="0" baseline="0" dirty="0" err="1" smtClean="0">
-                <a:ln>
-                  <a:noFill/>
-                </a:ln>
-                <a:solidFill>
-                  <a:schemeClr val="tx1"/>
-                </a:solidFill>
-                <a:effectLst/>
-                <a:latin typeface="Franklin Gothic Demi" pitchFamily="34" charset="0"/>
-                <a:cs typeface="Times New Roman" pitchFamily="18" charset="0"/>
-              </a:rPr>
-              <a:t>natao</a:t>
-            </a:r>
-            <a:r>
-              <a:rPr kumimoji="0" lang="en-GB" sz="6600" b="0" i="0" u="none" strike="noStrike" cap="none" normalizeH="0" baseline="0" dirty="0" smtClean="0">
-                <a:ln>
-                  <a:noFill/>
-                </a:ln>
-                <a:solidFill>
-                  <a:schemeClr val="tx1"/>
-                </a:solidFill>
-                <a:effectLst/>
-                <a:latin typeface="Franklin Gothic Demi" pitchFamily="34" charset="0"/>
-                <a:cs typeface="Times New Roman" pitchFamily="18" charset="0"/>
-              </a:rPr>
-              <a:t>.</a:t>
-            </a:r>
-            <a:endParaRPr kumimoji="0" lang="en-GB" sz="6600" b="0" i="0" u="none" strike="noStrike" cap="none" normalizeH="0" baseline="0" dirty="0" smtClean="0">
-              <a:ln>
-                <a:noFill/>
-              </a:ln>
-              <a:solidFill>
-                <a:schemeClr val="tx1"/>
-              </a:solidFill>
-              <a:effectLst/>
-              <a:latin typeface="Franklin Gothic Demi" pitchFamily="34" charset="0"/>
-            </a:endParaRPr>
+              <a:t>Tsy mety ny natao.</a:t>
+            </a:r>
           </a:p>
         </p:txBody>
       </p:sp>
     </p:spTree>
-    <p:extLst>
-      <p:ext uri="{BB962C8B-B14F-4D97-AF65-F5344CB8AC3E}">
-        <p14:creationId xmlns:p14="http://schemas.microsoft.com/office/powerpoint/2010/main" val="1593745477"/>
-      </p:ext>
-    </p:extLst>
   </p:cSld>
   <p:clrMapOvr>
     <a:masterClrMapping/>
@@ -3675,7 +3202,7 @@
 </file>
 
 <file path=ppt/slides/slide2.xml><?xml version="1.0" encoding="utf-8"?>
-<p:sld xmlns:a="http://schemas.openxmlformats.org/drawingml/2006/main" xmlns:r="http://schemas.openxmlformats.org/officeDocument/2006/relationships" xmlns:p="http://schemas.openxmlformats.org/presentationml/2006/main">
+<p:sld xmlns:p="http://schemas.openxmlformats.org/presentationml/2006/main" xmlns:a="http://schemas.openxmlformats.org/drawingml/2006/main">
   <p:cSld>
     <p:spTree>
       <p:nvGrpSpPr>
@@ -3693,259 +3220,134 @@
       </p:grpSpPr>
       <p:sp>
         <p:nvSpPr>
-          <p:cNvPr id="4" name="Rectangle 1"/>
-          <p:cNvSpPr>
-            <a:spLocks noChangeArrowheads="1"/>
-          </p:cNvSpPr>
+          <p:cNvPr name="TextBox 2" id="2"/>
+          <p:cNvSpPr txBox="true"/>
           <p:nvPr/>
         </p:nvSpPr>
-        <p:spPr bwMode="auto">
+        <p:spPr>
           <a:xfrm>
-            <a:off x="107504" y="856254"/>
-            <a:ext cx="9036496" cy="5170646"/>
+            <a:off x="635000" y="127000"/>
+            <a:ext cx="10922000" cy="508000"/>
           </a:xfrm>
           <a:prstGeom prst="rect">
             <a:avLst/>
           </a:prstGeom>
-          <a:noFill/>
-          <a:ln>
-            <a:noFill/>
-          </a:ln>
-          <a:effectLst/>
-          <a:extLst>
-            <a:ext uri="{909E8E84-426E-40DD-AFC4-6F175D3DCCD1}">
-              <a14:hiddenFill xmlns:a14="http://schemas.microsoft.com/office/drawing/2010/main">
-                <a:solidFill>
-                  <a:schemeClr val="accent1"/>
-                </a:solidFill>
-              </a14:hiddenFill>
-            </a:ext>
-            <a:ext uri="{91240B29-F687-4F45-9708-019B960494DF}">
-              <a14:hiddenLine xmlns:a14="http://schemas.microsoft.com/office/drawing/2010/main" w="9525">
-                <a:solidFill>
-                  <a:schemeClr val="tx1"/>
-                </a:solidFill>
-                <a:miter lim="800000"/>
-                <a:headEnd/>
-                <a:tailEnd/>
-              </a14:hiddenLine>
-            </a:ext>
-            <a:ext uri="{AF507438-7753-43E0-B8FC-AC1667EBCBE1}">
-              <a14:hiddenEffects xmlns:a14="http://schemas.microsoft.com/office/drawing/2010/main">
-                <a:effectLst>
-                  <a:outerShdw dist="35921" dir="2700000" algn="ctr" rotWithShape="0">
-                    <a:schemeClr val="bg2"/>
-                  </a:outerShdw>
-                </a:effectLst>
-              </a14:hiddenEffects>
-            </a:ext>
-          </a:extLst>
         </p:spPr>
         <p:txBody>
-          <a:bodyPr vert="horz" wrap="square" lIns="91440" tIns="45720" rIns="91440" bIns="45720" numCol="1" anchor="ctr" anchorCtr="0" compatLnSpc="1">
-            <a:prstTxWarp prst="textNoShape">
-              <a:avLst/>
-            </a:prstTxWarp>
-            <a:spAutoFit/>
-          </a:bodyPr>
-          <a:lstStyle/>
-          <a:p>
-            <a:pPr marL="0" marR="0" lvl="0" indent="0" algn="ctr" defTabSz="914400" rtl="0" eaLnBrk="1" fontAlgn="base" latinLnBrk="0" hangingPunct="1">
-              <a:lnSpc>
-                <a:spcPct val="100000"/>
-              </a:lnSpc>
-              <a:spcBef>
-                <a:spcPct val="0"/>
-              </a:spcBef>
-              <a:spcAft>
-                <a:spcPct val="0"/>
-              </a:spcAft>
-              <a:buClrTx/>
-              <a:buSzTx/>
-              <a:buFontTx/>
-              <a:buNone/>
-              <a:tabLst/>
+          <a:bodyPr anchor="t" rtlCol="false"/>
+          <a:lstStyle/>
+          <a:p>
+            <a:pPr algn="l">
+              <a:defRPr/>
             </a:pPr>
             <a:r>
-              <a:rPr lang="en-GB" sz="6600" dirty="0" smtClean="0">
+              <a:rPr lang="fr-MG"/>
+              <a:t/>
+            </a:r>
+            <a:endParaRPr lang="en-US" sz="1100"/>
+          </a:p>
+          <a:p>
+            <a:pPr algn="ctr"/>
+            <a:r>
+              <a:rPr lang="en-US" sz="3200" b="true">
                 <a:solidFill>
                   <a:srgbClr val="0000FF"/>
                 </a:solidFill>
-                <a:latin typeface="Franklin Gothic Demi" pitchFamily="34" charset="0"/>
-                <a:cs typeface="Times New Roman" pitchFamily="18" charset="0"/>
+                <a:latin typeface="Verdana"/>
               </a:rPr>
-              <a:t>FF 49</a:t>
-            </a:r>
-            <a:endParaRPr kumimoji="0" lang="en-GB" sz="6600" b="0" i="0" u="none" strike="noStrike" cap="none" normalizeH="0" baseline="0" dirty="0" smtClean="0">
-              <a:ln>
-                <a:noFill/>
-              </a:ln>
-              <a:solidFill>
-                <a:srgbClr val="0000FF"/>
-              </a:solidFill>
-              <a:effectLst/>
-              <a:latin typeface="Franklin Gothic Demi" pitchFamily="34" charset="0"/>
-              <a:cs typeface="Times New Roman" pitchFamily="18" charset="0"/>
-            </a:endParaRPr>
+              <a:t>HIRA 49</a:t>
+            </a:r>
+          </a:p>
+        </p:txBody>
+      </p:sp>
+      <p:sp>
+        <p:nvSpPr>
+          <p:cNvPr name="TextBox 3" id="3"/>
+          <p:cNvSpPr txBox="true"/>
+          <p:nvPr/>
+        </p:nvSpPr>
+        <p:spPr>
+          <a:xfrm>
+            <a:off x="635000" y="762000"/>
+            <a:ext cx="10922000" cy="5588000"/>
+          </a:xfrm>
+          <a:prstGeom prst="rect">
+            <a:avLst/>
+          </a:prstGeom>
+        </p:spPr>
+        <p:txBody>
+          <a:bodyPr anchor="t" rtlCol="false"/>
+          <a:lstStyle/>
+          <a:p>
+            <a:pPr algn="l">
+              <a:defRPr/>
+            </a:pPr>
+            <a:r>
+              <a:rPr lang="fr-MG"/>
+              <a:t/>
+            </a:r>
+            <a:endParaRPr lang="en-US" sz="1100"/>
           </a:p>
           <a:p>
             <a:pPr algn="ctr"/>
             <a:r>
-              <a:rPr lang="en-GB" sz="6600" dirty="0">
-                <a:latin typeface="Franklin Gothic Demi" pitchFamily="34" charset="0"/>
+              <a:rPr lang="en-US" sz="4500" b="true">
+                <a:solidFill>
+                  <a:srgbClr val="0000FF"/>
+                </a:solidFill>
+                <a:latin typeface="Verdana"/>
               </a:rPr>
-              <a:t> </a:t>
-            </a:r>
-            <a:r>
-              <a:rPr lang="en-GB" sz="6600" dirty="0" smtClean="0">
-                <a:solidFill>
-                  <a:srgbClr val="0070C0"/>
-                </a:solidFill>
-                <a:latin typeface="Franklin Gothic Demi" pitchFamily="34" charset="0"/>
+              <a:t>2- </a:t>
+            </a:r>
+            <a:r>
+              <a:rPr lang="en-US" sz="4500" b="true">
+                <a:solidFill>
+                  <a:srgbClr val="000000"/>
+                </a:solidFill>
+                <a:latin typeface="Verdana"/>
               </a:rPr>
-              <a:t>2-</a:t>
-            </a:r>
-            <a:r>
-              <a:rPr lang="en-GB" sz="6600" dirty="0" smtClean="0">
-                <a:latin typeface="Franklin Gothic Demi" pitchFamily="34" charset="0"/>
+              <a:t>Ny ota sesilany</a:t>
+            </a:r>
+          </a:p>
+          <a:p>
+            <a:pPr algn="ctr"/>
+            <a:r>
+              <a:rPr lang="en-US" sz="4500" b="true">
+                <a:solidFill>
+                  <a:srgbClr val="000000"/>
+                </a:solidFill>
+                <a:latin typeface="Verdana"/>
               </a:rPr>
-              <a:t> </a:t>
-            </a:r>
-            <a:r>
-              <a:rPr lang="en-GB" sz="6600" dirty="0" err="1">
-                <a:latin typeface="Franklin Gothic Demi" pitchFamily="34" charset="0"/>
+              <a:t>Nandramana avokoa</a:t>
+            </a:r>
+          </a:p>
+          <a:p>
+            <a:pPr algn="ctr"/>
+            <a:r>
+              <a:rPr lang="en-US" sz="4500" b="true">
+                <a:solidFill>
+                  <a:srgbClr val="000000"/>
+                </a:solidFill>
+                <a:latin typeface="Verdana"/>
               </a:rPr>
-              <a:t>Ny</a:t>
-            </a:r>
-            <a:r>
-              <a:rPr lang="en-GB" sz="6600" dirty="0">
-                <a:latin typeface="Franklin Gothic Demi" pitchFamily="34" charset="0"/>
+              <a:t>Kanefa re izahay</a:t>
+            </a:r>
+          </a:p>
+          <a:p>
+            <a:pPr algn="ctr"/>
+            <a:r>
+              <a:rPr lang="en-US" sz="4500" b="true">
+                <a:solidFill>
+                  <a:srgbClr val="000000"/>
+                </a:solidFill>
+                <a:latin typeface="Verdana"/>
               </a:rPr>
-              <a:t> </a:t>
-            </a:r>
-            <a:r>
-              <a:rPr lang="en-GB" sz="6600" dirty="0" err="1">
-                <a:latin typeface="Franklin Gothic Demi" pitchFamily="34" charset="0"/>
-              </a:rPr>
-              <a:t>ota</a:t>
-            </a:r>
-            <a:r>
-              <a:rPr lang="en-GB" sz="6600" dirty="0">
-                <a:latin typeface="Franklin Gothic Demi" pitchFamily="34" charset="0"/>
-              </a:rPr>
-              <a:t> </a:t>
-            </a:r>
-            <a:r>
-              <a:rPr lang="en-GB" sz="6600" dirty="0" err="1">
-                <a:latin typeface="Franklin Gothic Demi" pitchFamily="34" charset="0"/>
-              </a:rPr>
-              <a:t>sesilany</a:t>
-            </a:r>
-            <a:endParaRPr lang="en-GB" sz="6600" dirty="0" smtClean="0">
-              <a:latin typeface="Franklin Gothic Demi" pitchFamily="34" charset="0"/>
-            </a:endParaRPr>
-          </a:p>
-          <a:p>
-            <a:pPr algn="ctr"/>
-            <a:r>
-              <a:rPr lang="en-GB" sz="6600" dirty="0">
-                <a:latin typeface="Franklin Gothic Demi" pitchFamily="34" charset="0"/>
-              </a:rPr>
-              <a:t>   </a:t>
-            </a:r>
-            <a:r>
-              <a:rPr lang="en-GB" sz="6600" dirty="0" err="1">
-                <a:latin typeface="Franklin Gothic Demi" pitchFamily="34" charset="0"/>
-              </a:rPr>
-              <a:t>Nandramana</a:t>
-            </a:r>
-            <a:r>
-              <a:rPr lang="en-GB" sz="6600" dirty="0">
-                <a:latin typeface="Franklin Gothic Demi" pitchFamily="34" charset="0"/>
-              </a:rPr>
-              <a:t> </a:t>
-            </a:r>
-            <a:r>
-              <a:rPr lang="en-GB" sz="6600" dirty="0" err="1">
-                <a:latin typeface="Franklin Gothic Demi" pitchFamily="34" charset="0"/>
-              </a:rPr>
-              <a:t>avokoa</a:t>
-            </a:r>
-            <a:endParaRPr lang="en-GB" sz="6600" dirty="0" smtClean="0">
-              <a:latin typeface="Franklin Gothic Demi" pitchFamily="34" charset="0"/>
-            </a:endParaRPr>
-          </a:p>
-          <a:p>
-            <a:pPr algn="ctr"/>
-            <a:r>
-              <a:rPr lang="en-GB" sz="6600" dirty="0">
-                <a:latin typeface="Franklin Gothic Demi" pitchFamily="34" charset="0"/>
-              </a:rPr>
-              <a:t>   </a:t>
-            </a:r>
-            <a:r>
-              <a:rPr lang="en-GB" sz="6600" dirty="0" err="1">
-                <a:latin typeface="Franklin Gothic Demi" pitchFamily="34" charset="0"/>
-              </a:rPr>
-              <a:t>Kanefa</a:t>
-            </a:r>
-            <a:r>
-              <a:rPr lang="en-GB" sz="6600" dirty="0">
-                <a:latin typeface="Franklin Gothic Demi" pitchFamily="34" charset="0"/>
-              </a:rPr>
-              <a:t> re </a:t>
-            </a:r>
-            <a:r>
-              <a:rPr lang="en-GB" sz="6600" dirty="0" err="1">
-                <a:latin typeface="Franklin Gothic Demi" pitchFamily="34" charset="0"/>
-              </a:rPr>
-              <a:t>izahay</a:t>
-            </a:r>
-            <a:endParaRPr lang="en-GB" sz="6600" dirty="0" smtClean="0">
-              <a:latin typeface="Franklin Gothic Demi" pitchFamily="34" charset="0"/>
-            </a:endParaRPr>
-          </a:p>
-          <a:p>
-            <a:pPr algn="ctr"/>
-            <a:r>
-              <a:rPr lang="en-GB" sz="6600" dirty="0">
-                <a:latin typeface="Franklin Gothic Demi" pitchFamily="34" charset="0"/>
-              </a:rPr>
-              <a:t>   </a:t>
-            </a:r>
-            <a:r>
-              <a:rPr lang="en-GB" sz="6600" dirty="0" err="1">
-                <a:latin typeface="Franklin Gothic Demi" pitchFamily="34" charset="0"/>
-              </a:rPr>
-              <a:t>Ifonana</a:t>
-            </a:r>
-            <a:r>
-              <a:rPr lang="en-GB" sz="6600" dirty="0">
-                <a:latin typeface="Franklin Gothic Demi" pitchFamily="34" charset="0"/>
-              </a:rPr>
-              <a:t> </a:t>
-            </a:r>
-            <a:r>
-              <a:rPr lang="en-GB" sz="6600" dirty="0" err="1">
-                <a:latin typeface="Franklin Gothic Demi" pitchFamily="34" charset="0"/>
-              </a:rPr>
-              <a:t>tokoa</a:t>
-            </a:r>
-            <a:r>
-              <a:rPr lang="en-GB" sz="6600" dirty="0">
-                <a:latin typeface="Franklin Gothic Demi" pitchFamily="34" charset="0"/>
-              </a:rPr>
-              <a:t>.</a:t>
+              <a:t>Ifonana tokoa.</a:t>
             </a:r>
           </a:p>
         </p:txBody>
       </p:sp>
     </p:spTree>
-    <p:extLst>
-      <p:ext uri="{BB962C8B-B14F-4D97-AF65-F5344CB8AC3E}">
-        <p14:creationId xmlns:p14="http://schemas.microsoft.com/office/powerpoint/2010/main" val="124338775"/>
-      </p:ext>
-    </p:extLst>
   </p:cSld>
   <p:clrMapOvr>
     <a:masterClrMapping/>
@@ -3954,7 +3356,7 @@
 </file>
 
 <file path=ppt/slides/slide3.xml><?xml version="1.0" encoding="utf-8"?>
-<p:sld xmlns:a="http://schemas.openxmlformats.org/drawingml/2006/main" xmlns:r="http://schemas.openxmlformats.org/officeDocument/2006/relationships" xmlns:p="http://schemas.openxmlformats.org/presentationml/2006/main">
+<p:sld xmlns:p="http://schemas.openxmlformats.org/presentationml/2006/main" xmlns:a="http://schemas.openxmlformats.org/drawingml/2006/main">
   <p:cSld>
     <p:spTree>
       <p:nvGrpSpPr>
@@ -3972,184 +3374,134 @@
       </p:grpSpPr>
       <p:sp>
         <p:nvSpPr>
-          <p:cNvPr id="4" name="Rectangle 1"/>
-          <p:cNvSpPr>
-            <a:spLocks noChangeArrowheads="1"/>
-          </p:cNvSpPr>
+          <p:cNvPr name="TextBox 2" id="2"/>
+          <p:cNvSpPr txBox="true"/>
           <p:nvPr/>
         </p:nvSpPr>
-        <p:spPr bwMode="auto">
+        <p:spPr>
           <a:xfrm>
-            <a:off x="107504" y="856255"/>
-            <a:ext cx="9036496" cy="5170646"/>
+            <a:off x="635000" y="127000"/>
+            <a:ext cx="10922000" cy="508000"/>
           </a:xfrm>
           <a:prstGeom prst="rect">
             <a:avLst/>
           </a:prstGeom>
-          <a:noFill/>
-          <a:ln>
-            <a:noFill/>
-          </a:ln>
-          <a:effectLst/>
-          <a:extLst>
-            <a:ext uri="{909E8E84-426E-40DD-AFC4-6F175D3DCCD1}">
-              <a14:hiddenFill xmlns:a14="http://schemas.microsoft.com/office/drawing/2010/main">
-                <a:solidFill>
-                  <a:schemeClr val="accent1"/>
-                </a:solidFill>
-              </a14:hiddenFill>
-            </a:ext>
-            <a:ext uri="{91240B29-F687-4F45-9708-019B960494DF}">
-              <a14:hiddenLine xmlns:a14="http://schemas.microsoft.com/office/drawing/2010/main" w="9525">
-                <a:solidFill>
-                  <a:schemeClr val="tx1"/>
-                </a:solidFill>
-                <a:miter lim="800000"/>
-                <a:headEnd/>
-                <a:tailEnd/>
-              </a14:hiddenLine>
-            </a:ext>
-            <a:ext uri="{AF507438-7753-43E0-B8FC-AC1667EBCBE1}">
-              <a14:hiddenEffects xmlns:a14="http://schemas.microsoft.com/office/drawing/2010/main">
-                <a:effectLst>
-                  <a:outerShdw dist="35921" dir="2700000" algn="ctr" rotWithShape="0">
-                    <a:schemeClr val="bg2"/>
-                  </a:outerShdw>
-                </a:effectLst>
-              </a14:hiddenEffects>
-            </a:ext>
-          </a:extLst>
         </p:spPr>
         <p:txBody>
-          <a:bodyPr vert="horz" wrap="square" lIns="91440" tIns="45720" rIns="91440" bIns="45720" numCol="1" anchor="ctr" anchorCtr="0" compatLnSpc="1">
-            <a:prstTxWarp prst="textNoShape">
-              <a:avLst/>
-            </a:prstTxWarp>
-            <a:spAutoFit/>
-          </a:bodyPr>
-          <a:lstStyle/>
-          <a:p>
-            <a:pPr marL="0" marR="0" lvl="0" indent="0" algn="ctr" defTabSz="914400" rtl="0" eaLnBrk="1" fontAlgn="base" latinLnBrk="0" hangingPunct="1">
-              <a:lnSpc>
-                <a:spcPct val="100000"/>
-              </a:lnSpc>
-              <a:spcBef>
-                <a:spcPct val="0"/>
-              </a:spcBef>
-              <a:spcAft>
-                <a:spcPct val="0"/>
-              </a:spcAft>
-              <a:buClrTx/>
-              <a:buSzTx/>
-              <a:buFontTx/>
-              <a:buNone/>
-              <a:tabLst/>
+          <a:bodyPr anchor="t" rtlCol="false"/>
+          <a:lstStyle/>
+          <a:p>
+            <a:pPr algn="l">
+              <a:defRPr/>
             </a:pPr>
             <a:r>
-              <a:rPr lang="en-GB" sz="6600" dirty="0" smtClean="0">
+              <a:rPr lang="fr-MG"/>
+              <a:t/>
+            </a:r>
+            <a:endParaRPr lang="en-US" sz="1100"/>
+          </a:p>
+          <a:p>
+            <a:pPr algn="ctr"/>
+            <a:r>
+              <a:rPr lang="en-US" sz="3200" b="true">
                 <a:solidFill>
                   <a:srgbClr val="0000FF"/>
                 </a:solidFill>
-                <a:latin typeface="Franklin Gothic Demi" pitchFamily="34" charset="0"/>
-                <a:cs typeface="Times New Roman" pitchFamily="18" charset="0"/>
+                <a:latin typeface="Verdana"/>
               </a:rPr>
-              <a:t>FF 49</a:t>
-            </a:r>
-            <a:endParaRPr kumimoji="0" lang="en-GB" sz="6600" b="0" i="0" u="none" strike="noStrike" cap="none" normalizeH="0" baseline="0" dirty="0" smtClean="0">
-              <a:ln>
-                <a:noFill/>
-              </a:ln>
-              <a:solidFill>
-                <a:srgbClr val="0000FF"/>
-              </a:solidFill>
-              <a:effectLst/>
-              <a:latin typeface="Franklin Gothic Demi" pitchFamily="34" charset="0"/>
-              <a:cs typeface="Times New Roman" pitchFamily="18" charset="0"/>
-            </a:endParaRPr>
+              <a:t>HIRA 49</a:t>
+            </a:r>
+          </a:p>
+        </p:txBody>
+      </p:sp>
+      <p:sp>
+        <p:nvSpPr>
+          <p:cNvPr name="TextBox 3" id="3"/>
+          <p:cNvSpPr txBox="true"/>
+          <p:nvPr/>
+        </p:nvSpPr>
+        <p:spPr>
+          <a:xfrm>
+            <a:off x="635000" y="762000"/>
+            <a:ext cx="10922000" cy="5588000"/>
+          </a:xfrm>
+          <a:prstGeom prst="rect">
+            <a:avLst/>
+          </a:prstGeom>
+        </p:spPr>
+        <p:txBody>
+          <a:bodyPr anchor="t" rtlCol="false"/>
+          <a:lstStyle/>
+          <a:p>
+            <a:pPr algn="l">
+              <a:defRPr/>
+            </a:pPr>
+            <a:r>
+              <a:rPr lang="fr-MG"/>
+              <a:t/>
+            </a:r>
+            <a:endParaRPr lang="en-US" sz="1100"/>
           </a:p>
           <a:p>
             <a:pPr algn="ctr"/>
             <a:r>
-              <a:rPr lang="en-GB" sz="6600" dirty="0">
-                <a:latin typeface="Franklin Gothic Demi" pitchFamily="34" charset="0"/>
+              <a:rPr lang="en-US" sz="4500" b="true">
+                <a:solidFill>
+                  <a:srgbClr val="0000FF"/>
+                </a:solidFill>
+                <a:latin typeface="Verdana"/>
               </a:rPr>
-              <a:t> </a:t>
-            </a:r>
-            <a:r>
-              <a:rPr lang="en-GB" sz="6600" dirty="0">
-                <a:solidFill>
-                  <a:srgbClr val="0070C0"/>
-                </a:solidFill>
-                <a:latin typeface="Franklin Gothic Demi" pitchFamily="34" charset="0"/>
-              </a:rPr>
-              <a:t>3</a:t>
-            </a:r>
-            <a:r>
-              <a:rPr lang="en-GB" sz="6600" dirty="0" smtClean="0">
-                <a:solidFill>
-                  <a:srgbClr val="0070C0"/>
-                </a:solidFill>
-                <a:latin typeface="Franklin Gothic Demi" pitchFamily="34" charset="0"/>
-              </a:rPr>
-              <a:t>-</a:t>
-            </a:r>
-            <a:r>
-              <a:rPr lang="en-GB" sz="6600" dirty="0" smtClean="0">
-                <a:latin typeface="Franklin Gothic Demi" pitchFamily="34" charset="0"/>
-              </a:rPr>
-              <a:t> </a:t>
-            </a:r>
-            <a:r>
-              <a:rPr lang="sv-SE" sz="6600" dirty="0">
-                <a:latin typeface="Franklin Gothic Demi" pitchFamily="34" charset="0"/>
+              <a:t>3- </a:t>
+            </a:r>
+            <a:r>
+              <a:rPr lang="en-US" sz="4500" b="true">
+                <a:solidFill>
+                  <a:srgbClr val="000000"/>
+                </a:solidFill>
+                <a:latin typeface="Verdana"/>
               </a:rPr>
               <a:t>Izay rehetra hita</a:t>
             </a:r>
-            <a:endParaRPr lang="sv-SE" sz="6600" dirty="0" smtClean="0">
-              <a:latin typeface="Franklin Gothic Demi" pitchFamily="34" charset="0"/>
-            </a:endParaRPr>
           </a:p>
           <a:p>
             <a:pPr algn="ctr"/>
             <a:r>
-              <a:rPr lang="sv-SE" sz="6600" dirty="0">
-                <a:latin typeface="Franklin Gothic Demi" pitchFamily="34" charset="0"/>
+              <a:rPr lang="en-US" sz="4500" b="true">
+                <a:solidFill>
+                  <a:srgbClr val="000000"/>
+                </a:solidFill>
+                <a:latin typeface="Verdana"/>
               </a:rPr>
-              <a:t>   Natao fa tsy ho to</a:t>
-            </a:r>
-            <a:endParaRPr lang="sv-SE" sz="6600" dirty="0" smtClean="0">
-              <a:latin typeface="Franklin Gothic Demi" pitchFamily="34" charset="0"/>
-            </a:endParaRPr>
+              <a:t>Natao fa tsy ho to</a:t>
+            </a:r>
           </a:p>
           <a:p>
             <a:pPr algn="ctr"/>
             <a:r>
-              <a:rPr lang="sv-SE" sz="6600" dirty="0">
-                <a:latin typeface="Franklin Gothic Demi" pitchFamily="34" charset="0"/>
+              <a:rPr lang="en-US" sz="4500" b="true">
+                <a:solidFill>
+                  <a:srgbClr val="000000"/>
+                </a:solidFill>
+                <a:latin typeface="Verdana"/>
               </a:rPr>
-              <a:t>   Izao ny ratsy vita</a:t>
-            </a:r>
-            <a:endParaRPr lang="sv-SE" sz="6600" dirty="0" smtClean="0">
-              <a:latin typeface="Franklin Gothic Demi" pitchFamily="34" charset="0"/>
-            </a:endParaRPr>
+              <a:t>Izao ny ratsy vita</a:t>
+            </a:r>
           </a:p>
           <a:p>
             <a:pPr algn="ctr"/>
             <a:r>
-              <a:rPr lang="sv-SE" sz="6600" dirty="0">
-                <a:latin typeface="Franklin Gothic Demi" pitchFamily="34" charset="0"/>
+              <a:rPr lang="en-US" sz="4500" b="true">
+                <a:solidFill>
+                  <a:srgbClr val="000000"/>
+                </a:solidFill>
+                <a:latin typeface="Verdana"/>
               </a:rPr>
-              <a:t>   Nandrotika ny fo.</a:t>
+              <a:t>Nandrotika ny fo.</a:t>
             </a:r>
           </a:p>
         </p:txBody>
       </p:sp>
     </p:spTree>
-    <p:extLst>
-      <p:ext uri="{BB962C8B-B14F-4D97-AF65-F5344CB8AC3E}">
-        <p14:creationId xmlns:p14="http://schemas.microsoft.com/office/powerpoint/2010/main" val="774204226"/>
-      </p:ext>
-    </p:extLst>
   </p:cSld>
   <p:clrMapOvr>
     <a:masterClrMapping/>
@@ -4158,7 +3510,7 @@
 </file>
 
 <file path=ppt/slides/slide4.xml><?xml version="1.0" encoding="utf-8"?>
-<p:sld xmlns:a="http://schemas.openxmlformats.org/drawingml/2006/main" xmlns:r="http://schemas.openxmlformats.org/officeDocument/2006/relationships" xmlns:p="http://schemas.openxmlformats.org/presentationml/2006/main">
+<p:sld xmlns:p="http://schemas.openxmlformats.org/presentationml/2006/main" xmlns:a="http://schemas.openxmlformats.org/drawingml/2006/main">
   <p:cSld>
     <p:spTree>
       <p:nvGrpSpPr>
@@ -4176,298 +3528,134 @@
       </p:grpSpPr>
       <p:sp>
         <p:nvSpPr>
-          <p:cNvPr id="4" name="Rectangle 1"/>
-          <p:cNvSpPr>
-            <a:spLocks noChangeArrowheads="1"/>
-          </p:cNvSpPr>
+          <p:cNvPr name="TextBox 2" id="2"/>
+          <p:cNvSpPr txBox="true"/>
           <p:nvPr/>
         </p:nvSpPr>
-        <p:spPr bwMode="auto">
+        <p:spPr>
           <a:xfrm>
-            <a:off x="107504" y="348424"/>
-            <a:ext cx="9036496" cy="6186309"/>
+            <a:off x="635000" y="127000"/>
+            <a:ext cx="10922000" cy="508000"/>
           </a:xfrm>
           <a:prstGeom prst="rect">
             <a:avLst/>
           </a:prstGeom>
-          <a:noFill/>
-          <a:ln>
-            <a:noFill/>
-          </a:ln>
-          <a:effectLst/>
-          <a:extLst>
-            <a:ext uri="{909E8E84-426E-40DD-AFC4-6F175D3DCCD1}">
-              <a14:hiddenFill xmlns:a14="http://schemas.microsoft.com/office/drawing/2010/main">
-                <a:solidFill>
-                  <a:schemeClr val="accent1"/>
-                </a:solidFill>
-              </a14:hiddenFill>
-            </a:ext>
-            <a:ext uri="{91240B29-F687-4F45-9708-019B960494DF}">
-              <a14:hiddenLine xmlns:a14="http://schemas.microsoft.com/office/drawing/2010/main" w="9525">
-                <a:solidFill>
-                  <a:schemeClr val="tx1"/>
-                </a:solidFill>
-                <a:miter lim="800000"/>
-                <a:headEnd/>
-                <a:tailEnd/>
-              </a14:hiddenLine>
-            </a:ext>
-            <a:ext uri="{AF507438-7753-43E0-B8FC-AC1667EBCBE1}">
-              <a14:hiddenEffects xmlns:a14="http://schemas.microsoft.com/office/drawing/2010/main">
-                <a:effectLst>
-                  <a:outerShdw dist="35921" dir="2700000" algn="ctr" rotWithShape="0">
-                    <a:schemeClr val="bg2"/>
-                  </a:outerShdw>
-                </a:effectLst>
-              </a14:hiddenEffects>
-            </a:ext>
-          </a:extLst>
         </p:spPr>
         <p:txBody>
-          <a:bodyPr vert="horz" wrap="square" lIns="91440" tIns="45720" rIns="91440" bIns="45720" numCol="1" anchor="ctr" anchorCtr="0" compatLnSpc="1">
-            <a:prstTxWarp prst="textNoShape">
-              <a:avLst/>
-            </a:prstTxWarp>
-            <a:spAutoFit/>
-          </a:bodyPr>
-          <a:lstStyle/>
-          <a:p>
-            <a:pPr marL="0" marR="0" lvl="0" indent="0" algn="ctr" defTabSz="914400" rtl="0" eaLnBrk="1" fontAlgn="base" latinLnBrk="0" hangingPunct="1">
-              <a:lnSpc>
-                <a:spcPct val="100000"/>
-              </a:lnSpc>
-              <a:spcBef>
-                <a:spcPct val="0"/>
-              </a:spcBef>
-              <a:spcAft>
-                <a:spcPct val="0"/>
-              </a:spcAft>
-              <a:buClrTx/>
-              <a:buSzTx/>
-              <a:buFontTx/>
-              <a:buNone/>
-              <a:tabLst/>
+          <a:bodyPr anchor="t" rtlCol="false"/>
+          <a:lstStyle/>
+          <a:p>
+            <a:pPr algn="l">
+              <a:defRPr/>
             </a:pPr>
             <a:r>
-              <a:rPr lang="en-GB" sz="6600" dirty="0" smtClean="0">
+              <a:rPr lang="fr-MG"/>
+              <a:t/>
+            </a:r>
+            <a:endParaRPr lang="en-US" sz="1100"/>
+          </a:p>
+          <a:p>
+            <a:pPr algn="ctr"/>
+            <a:r>
+              <a:rPr lang="en-US" sz="3200" b="true">
                 <a:solidFill>
                   <a:srgbClr val="0000FF"/>
                 </a:solidFill>
-                <a:latin typeface="Franklin Gothic Demi" pitchFamily="34" charset="0"/>
-                <a:cs typeface="Times New Roman" pitchFamily="18" charset="0"/>
+                <a:latin typeface="Verdana"/>
               </a:rPr>
-              <a:t>FF 49</a:t>
-            </a:r>
-            <a:endParaRPr kumimoji="0" lang="en-GB" sz="6600" b="0" i="0" u="none" strike="noStrike" cap="none" normalizeH="0" baseline="0" dirty="0" smtClean="0">
-              <a:ln>
-                <a:noFill/>
-              </a:ln>
-              <a:solidFill>
-                <a:srgbClr val="0000FF"/>
-              </a:solidFill>
-              <a:effectLst/>
-              <a:latin typeface="Franklin Gothic Demi" pitchFamily="34" charset="0"/>
-              <a:cs typeface="Times New Roman" pitchFamily="18" charset="0"/>
-            </a:endParaRPr>
+              <a:t>HIRA 49</a:t>
+            </a:r>
+          </a:p>
+        </p:txBody>
+      </p:sp>
+      <p:sp>
+        <p:nvSpPr>
+          <p:cNvPr name="TextBox 3" id="3"/>
+          <p:cNvSpPr txBox="true"/>
+          <p:nvPr/>
+        </p:nvSpPr>
+        <p:spPr>
+          <a:xfrm>
+            <a:off x="635000" y="762000"/>
+            <a:ext cx="10922000" cy="5588000"/>
+          </a:xfrm>
+          <a:prstGeom prst="rect">
+            <a:avLst/>
+          </a:prstGeom>
+        </p:spPr>
+        <p:txBody>
+          <a:bodyPr anchor="t" rtlCol="false"/>
+          <a:lstStyle/>
+          <a:p>
+            <a:pPr algn="l">
+              <a:defRPr/>
+            </a:pPr>
+            <a:r>
+              <a:rPr lang="fr-MG"/>
+              <a:t/>
+            </a:r>
+            <a:endParaRPr lang="en-US" sz="1100"/>
           </a:p>
           <a:p>
             <a:pPr algn="ctr"/>
             <a:r>
-              <a:rPr lang="en-GB" sz="6600" dirty="0">
-                <a:latin typeface="Franklin Gothic Demi" pitchFamily="34" charset="0"/>
+              <a:rPr lang="en-US" sz="4500" b="true">
+                <a:solidFill>
+                  <a:srgbClr val="0000FF"/>
+                </a:solidFill>
+                <a:latin typeface="Verdana"/>
               </a:rPr>
-              <a:t> </a:t>
-            </a:r>
-            <a:r>
-              <a:rPr lang="en-GB" sz="6600" dirty="0" smtClean="0">
-                <a:solidFill>
-                  <a:srgbClr val="0070C0"/>
-                </a:solidFill>
-                <a:latin typeface="Franklin Gothic Demi" pitchFamily="34" charset="0"/>
+              <a:t>4- </a:t>
+            </a:r>
+            <a:r>
+              <a:rPr lang="en-US" sz="4500" b="true">
+                <a:solidFill>
+                  <a:srgbClr val="000000"/>
+                </a:solidFill>
+                <a:latin typeface="Verdana"/>
               </a:rPr>
-              <a:t>4-</a:t>
-            </a:r>
-            <a:r>
-              <a:rPr lang="en-GB" sz="6600" dirty="0" smtClean="0">
-                <a:latin typeface="Franklin Gothic Demi" pitchFamily="34" charset="0"/>
+              <a:t>Ry Jeso ô ! anio</a:t>
+            </a:r>
+          </a:p>
+          <a:p>
+            <a:pPr algn="ctr"/>
+            <a:r>
+              <a:rPr lang="en-US" sz="4500" b="true">
+                <a:solidFill>
+                  <a:srgbClr val="000000"/>
+                </a:solidFill>
+                <a:latin typeface="Verdana"/>
               </a:rPr>
-              <a:t> </a:t>
-            </a:r>
-            <a:r>
-              <a:rPr lang="en-GB" sz="6600" dirty="0" err="1">
-                <a:latin typeface="Franklin Gothic Demi" pitchFamily="34" charset="0"/>
+              <a:t>Indreto izahay</a:t>
+            </a:r>
+          </a:p>
+          <a:p>
+            <a:pPr algn="ctr"/>
+            <a:r>
+              <a:rPr lang="en-US" sz="4500" b="true">
+                <a:solidFill>
+                  <a:srgbClr val="000000"/>
+                </a:solidFill>
+                <a:latin typeface="Verdana"/>
               </a:rPr>
-              <a:t>Ry</a:t>
-            </a:r>
-            <a:r>
-              <a:rPr lang="en-GB" sz="6600" dirty="0">
-                <a:latin typeface="Franklin Gothic Demi" pitchFamily="34" charset="0"/>
+              <a:t>Manaiky ka fidio</a:t>
+            </a:r>
+          </a:p>
+          <a:p>
+            <a:pPr algn="ctr"/>
+            <a:r>
+              <a:rPr lang="en-US" sz="4500" b="true">
+                <a:solidFill>
+                  <a:srgbClr val="000000"/>
+                </a:solidFill>
+                <a:latin typeface="Verdana"/>
               </a:rPr>
-              <a:t> </a:t>
-            </a:r>
-            <a:r>
-              <a:rPr lang="en-GB" sz="6600" dirty="0" err="1">
-                <a:latin typeface="Franklin Gothic Demi" pitchFamily="34" charset="0"/>
-              </a:rPr>
-              <a:t>Jeso</a:t>
-            </a:r>
-            <a:r>
-              <a:rPr lang="en-GB" sz="6600" dirty="0">
-                <a:latin typeface="Franklin Gothic Demi" pitchFamily="34" charset="0"/>
-              </a:rPr>
-              <a:t> ô ! </a:t>
-            </a:r>
-            <a:r>
-              <a:rPr lang="en-GB" sz="6600" dirty="0" err="1">
-                <a:latin typeface="Franklin Gothic Demi" pitchFamily="34" charset="0"/>
-              </a:rPr>
-              <a:t>anio</a:t>
-            </a:r>
-            <a:endParaRPr lang="en-GB" sz="6600" dirty="0" smtClean="0">
-              <a:latin typeface="Franklin Gothic Demi" pitchFamily="34" charset="0"/>
-            </a:endParaRPr>
-          </a:p>
-          <a:p>
-            <a:pPr algn="ctr"/>
-            <a:r>
-              <a:rPr lang="en-GB" sz="6600" dirty="0">
-                <a:latin typeface="Franklin Gothic Demi" pitchFamily="34" charset="0"/>
-              </a:rPr>
-              <a:t>   </a:t>
-            </a:r>
-            <a:r>
-              <a:rPr lang="en-GB" sz="6600" dirty="0" err="1">
-                <a:latin typeface="Franklin Gothic Demi" pitchFamily="34" charset="0"/>
-              </a:rPr>
-              <a:t>Indreto</a:t>
-            </a:r>
-            <a:r>
-              <a:rPr lang="en-GB" sz="6600" dirty="0">
-                <a:latin typeface="Franklin Gothic Demi" pitchFamily="34" charset="0"/>
-              </a:rPr>
-              <a:t> </a:t>
-            </a:r>
-            <a:r>
-              <a:rPr lang="en-GB" sz="6600" dirty="0" err="1">
-                <a:latin typeface="Franklin Gothic Demi" pitchFamily="34" charset="0"/>
-              </a:rPr>
-              <a:t>izahay</a:t>
-            </a:r>
-            <a:endParaRPr lang="en-GB" sz="6600" dirty="0" smtClean="0">
-              <a:latin typeface="Franklin Gothic Demi" pitchFamily="34" charset="0"/>
-            </a:endParaRPr>
-          </a:p>
-          <a:p>
-            <a:pPr algn="ctr"/>
-            <a:r>
-              <a:rPr lang="en-GB" sz="6600" dirty="0">
-                <a:latin typeface="Franklin Gothic Demi" pitchFamily="34" charset="0"/>
-              </a:rPr>
-              <a:t>   </a:t>
-            </a:r>
-            <a:r>
-              <a:rPr lang="en-GB" sz="6600" dirty="0" err="1">
-                <a:latin typeface="Franklin Gothic Demi" pitchFamily="34" charset="0"/>
-              </a:rPr>
-              <a:t>Manaiky</a:t>
-            </a:r>
-            <a:r>
-              <a:rPr lang="en-GB" sz="6600" dirty="0">
-                <a:latin typeface="Franklin Gothic Demi" pitchFamily="34" charset="0"/>
-              </a:rPr>
-              <a:t> </a:t>
-            </a:r>
-            <a:r>
-              <a:rPr lang="en-GB" sz="6600" dirty="0" err="1">
-                <a:latin typeface="Franklin Gothic Demi" pitchFamily="34" charset="0"/>
-              </a:rPr>
-              <a:t>ka</a:t>
-            </a:r>
-            <a:r>
-              <a:rPr lang="en-GB" sz="6600" dirty="0">
-                <a:latin typeface="Franklin Gothic Demi" pitchFamily="34" charset="0"/>
-              </a:rPr>
-              <a:t> </a:t>
-            </a:r>
-            <a:r>
-              <a:rPr lang="en-GB" sz="6600" dirty="0" err="1">
-                <a:latin typeface="Franklin Gothic Demi" pitchFamily="34" charset="0"/>
-              </a:rPr>
-              <a:t>fidio</a:t>
-            </a:r>
-            <a:endParaRPr lang="en-GB" sz="6600" dirty="0" smtClean="0">
-              <a:latin typeface="Franklin Gothic Demi" pitchFamily="34" charset="0"/>
-            </a:endParaRPr>
-          </a:p>
-          <a:p>
-            <a:pPr algn="ctr"/>
-            <a:r>
-              <a:rPr lang="en-GB" sz="6600" dirty="0">
-                <a:latin typeface="Franklin Gothic Demi" pitchFamily="34" charset="0"/>
-              </a:rPr>
-              <a:t>   </a:t>
-            </a:r>
-            <a:r>
-              <a:rPr lang="en-GB" sz="6600" dirty="0" err="1">
-                <a:latin typeface="Franklin Gothic Demi" pitchFamily="34" charset="0"/>
-              </a:rPr>
-              <a:t>Ho</a:t>
-            </a:r>
-            <a:r>
-              <a:rPr lang="en-GB" sz="6600" dirty="0">
-                <a:latin typeface="Franklin Gothic Demi" pitchFamily="34" charset="0"/>
-              </a:rPr>
-              <a:t> </a:t>
-            </a:r>
-            <a:r>
-              <a:rPr lang="en-GB" sz="6600" dirty="0" err="1">
-                <a:latin typeface="Franklin Gothic Demi" pitchFamily="34" charset="0"/>
-              </a:rPr>
-              <a:t>zanakao</a:t>
-            </a:r>
-            <a:r>
-              <a:rPr lang="en-GB" sz="6600" dirty="0">
-                <a:latin typeface="Franklin Gothic Demi" pitchFamily="34" charset="0"/>
-              </a:rPr>
-              <a:t> </a:t>
-            </a:r>
-            <a:r>
-              <a:rPr lang="en-GB" sz="6600" dirty="0" err="1">
-                <a:latin typeface="Franklin Gothic Demi" pitchFamily="34" charset="0"/>
-              </a:rPr>
-              <a:t>ry</a:t>
-            </a:r>
-            <a:r>
-              <a:rPr lang="en-GB" sz="6600" dirty="0">
-                <a:latin typeface="Franklin Gothic Demi" pitchFamily="34" charset="0"/>
-              </a:rPr>
-              <a:t> Ray.</a:t>
-            </a:r>
-            <a:endParaRPr lang="en-GB" sz="6600" dirty="0" smtClean="0">
-              <a:latin typeface="Franklin Gothic Demi" pitchFamily="34" charset="0"/>
-            </a:endParaRPr>
-          </a:p>
-          <a:p>
-            <a:pPr algn="ctr"/>
-            <a:r>
-              <a:rPr lang="sv-SE" sz="6600" dirty="0" smtClean="0">
-                <a:latin typeface="Franklin Gothic Demi" pitchFamily="34" charset="0"/>
-              </a:rPr>
-              <a:t>.</a:t>
-            </a:r>
-            <a:endParaRPr lang="sv-SE" sz="6600" dirty="0">
-              <a:latin typeface="Franklin Gothic Demi" pitchFamily="34" charset="0"/>
-            </a:endParaRPr>
+              <a:t>Ho zanakao ry Ray.</a:t>
+            </a:r>
           </a:p>
         </p:txBody>
       </p:sp>
     </p:spTree>
-    <p:extLst>
-      <p:ext uri="{BB962C8B-B14F-4D97-AF65-F5344CB8AC3E}">
-        <p14:creationId xmlns:p14="http://schemas.microsoft.com/office/powerpoint/2010/main" val="2875818308"/>
-      </p:ext>
-    </p:extLst>
   </p:cSld>
   <p:clrMapOvr>
     <a:masterClrMapping/>
@@ -4476,7 +3664,7 @@
 </file>
 
 <file path=ppt/slides/slide5.xml><?xml version="1.0" encoding="utf-8"?>
-<p:sld xmlns:a="http://schemas.openxmlformats.org/drawingml/2006/main" xmlns:r="http://schemas.openxmlformats.org/officeDocument/2006/relationships" xmlns:p="http://schemas.openxmlformats.org/presentationml/2006/main">
+<p:sld xmlns:p="http://schemas.openxmlformats.org/presentationml/2006/main" xmlns:a="http://schemas.openxmlformats.org/drawingml/2006/main">
   <p:cSld>
     <p:spTree>
       <p:nvGrpSpPr>
@@ -4494,325 +3682,134 @@
       </p:grpSpPr>
       <p:sp>
         <p:nvSpPr>
-          <p:cNvPr id="4" name="Rectangle 1"/>
-          <p:cNvSpPr>
-            <a:spLocks noChangeArrowheads="1"/>
-          </p:cNvSpPr>
+          <p:cNvPr name="TextBox 2" id="2"/>
+          <p:cNvSpPr txBox="true"/>
           <p:nvPr/>
         </p:nvSpPr>
-        <p:spPr bwMode="auto">
+        <p:spPr>
           <a:xfrm>
-            <a:off x="107504" y="348425"/>
-            <a:ext cx="9036496" cy="6186309"/>
+            <a:off x="635000" y="127000"/>
+            <a:ext cx="10922000" cy="508000"/>
           </a:xfrm>
           <a:prstGeom prst="rect">
             <a:avLst/>
           </a:prstGeom>
-          <a:noFill/>
-          <a:ln>
-            <a:noFill/>
-          </a:ln>
-          <a:effectLst/>
-          <a:extLst>
-            <a:ext uri="{909E8E84-426E-40DD-AFC4-6F175D3DCCD1}">
-              <a14:hiddenFill xmlns:a14="http://schemas.microsoft.com/office/drawing/2010/main">
-                <a:solidFill>
-                  <a:schemeClr val="accent1"/>
-                </a:solidFill>
-              </a14:hiddenFill>
-            </a:ext>
-            <a:ext uri="{91240B29-F687-4F45-9708-019B960494DF}">
-              <a14:hiddenLine xmlns:a14="http://schemas.microsoft.com/office/drawing/2010/main" w="9525">
-                <a:solidFill>
-                  <a:schemeClr val="tx1"/>
-                </a:solidFill>
-                <a:miter lim="800000"/>
-                <a:headEnd/>
-                <a:tailEnd/>
-              </a14:hiddenLine>
-            </a:ext>
-            <a:ext uri="{AF507438-7753-43E0-B8FC-AC1667EBCBE1}">
-              <a14:hiddenEffects xmlns:a14="http://schemas.microsoft.com/office/drawing/2010/main">
-                <a:effectLst>
-                  <a:outerShdw dist="35921" dir="2700000" algn="ctr" rotWithShape="0">
-                    <a:schemeClr val="bg2"/>
-                  </a:outerShdw>
-                </a:effectLst>
-              </a14:hiddenEffects>
-            </a:ext>
-          </a:extLst>
         </p:spPr>
         <p:txBody>
-          <a:bodyPr vert="horz" wrap="square" lIns="91440" tIns="45720" rIns="91440" bIns="45720" numCol="1" anchor="ctr" anchorCtr="0" compatLnSpc="1">
-            <a:prstTxWarp prst="textNoShape">
-              <a:avLst/>
-            </a:prstTxWarp>
-            <a:spAutoFit/>
-          </a:bodyPr>
-          <a:lstStyle/>
-          <a:p>
-            <a:pPr marL="0" marR="0" lvl="0" indent="0" algn="ctr" defTabSz="914400" rtl="0" eaLnBrk="1" fontAlgn="base" latinLnBrk="0" hangingPunct="1">
-              <a:lnSpc>
-                <a:spcPct val="100000"/>
-              </a:lnSpc>
-              <a:spcBef>
-                <a:spcPct val="0"/>
-              </a:spcBef>
-              <a:spcAft>
-                <a:spcPct val="0"/>
-              </a:spcAft>
-              <a:buClrTx/>
-              <a:buSzTx/>
-              <a:buFontTx/>
-              <a:buNone/>
-              <a:tabLst/>
+          <a:bodyPr anchor="t" rtlCol="false"/>
+          <a:lstStyle/>
+          <a:p>
+            <a:pPr algn="l">
+              <a:defRPr/>
             </a:pPr>
             <a:r>
-              <a:rPr lang="en-GB" sz="6600" dirty="0" smtClean="0">
+              <a:rPr lang="fr-MG"/>
+              <a:t/>
+            </a:r>
+            <a:endParaRPr lang="en-US" sz="1100"/>
+          </a:p>
+          <a:p>
+            <a:pPr algn="ctr"/>
+            <a:r>
+              <a:rPr lang="en-US" sz="3200" b="true">
                 <a:solidFill>
                   <a:srgbClr val="0000FF"/>
                 </a:solidFill>
-                <a:latin typeface="Franklin Gothic Demi" pitchFamily="34" charset="0"/>
-                <a:cs typeface="Times New Roman" pitchFamily="18" charset="0"/>
+                <a:latin typeface="Verdana"/>
               </a:rPr>
-              <a:t>FF 49</a:t>
-            </a:r>
-            <a:endParaRPr kumimoji="0" lang="en-GB" sz="6600" b="0" i="0" u="none" strike="noStrike" cap="none" normalizeH="0" baseline="0" dirty="0" smtClean="0">
-              <a:ln>
-                <a:noFill/>
-              </a:ln>
-              <a:solidFill>
-                <a:srgbClr val="0000FF"/>
-              </a:solidFill>
-              <a:effectLst/>
-              <a:latin typeface="Franklin Gothic Demi" pitchFamily="34" charset="0"/>
-              <a:cs typeface="Times New Roman" pitchFamily="18" charset="0"/>
-            </a:endParaRPr>
+              <a:t>HIRA 49</a:t>
+            </a:r>
+          </a:p>
+        </p:txBody>
+      </p:sp>
+      <p:sp>
+        <p:nvSpPr>
+          <p:cNvPr name="TextBox 3" id="3"/>
+          <p:cNvSpPr txBox="true"/>
+          <p:nvPr/>
+        </p:nvSpPr>
+        <p:spPr>
+          <a:xfrm>
+            <a:off x="635000" y="762000"/>
+            <a:ext cx="10922000" cy="5588000"/>
+          </a:xfrm>
+          <a:prstGeom prst="rect">
+            <a:avLst/>
+          </a:prstGeom>
+        </p:spPr>
+        <p:txBody>
+          <a:bodyPr anchor="t" rtlCol="false"/>
+          <a:lstStyle/>
+          <a:p>
+            <a:pPr algn="l">
+              <a:defRPr/>
+            </a:pPr>
+            <a:r>
+              <a:rPr lang="fr-MG"/>
+              <a:t/>
+            </a:r>
+            <a:endParaRPr lang="en-US" sz="1100"/>
           </a:p>
           <a:p>
             <a:pPr algn="ctr"/>
             <a:r>
-              <a:rPr lang="en-GB" sz="6600" dirty="0">
-                <a:latin typeface="Franklin Gothic Demi" pitchFamily="34" charset="0"/>
+              <a:rPr lang="en-US" sz="4500" b="true">
+                <a:solidFill>
+                  <a:srgbClr val="0000FF"/>
+                </a:solidFill>
+                <a:latin typeface="Verdana"/>
               </a:rPr>
-              <a:t> </a:t>
-            </a:r>
-            <a:r>
-              <a:rPr lang="en-GB" sz="6600" dirty="0">
-                <a:solidFill>
-                  <a:srgbClr val="0070C0"/>
-                </a:solidFill>
-                <a:latin typeface="Franklin Gothic Demi" pitchFamily="34" charset="0"/>
+              <a:t>5- </a:t>
+            </a:r>
+            <a:r>
+              <a:rPr lang="en-US" sz="4500" b="true">
+                <a:solidFill>
+                  <a:srgbClr val="000000"/>
+                </a:solidFill>
+                <a:latin typeface="Verdana"/>
               </a:rPr>
-              <a:t>5</a:t>
-            </a:r>
-            <a:r>
-              <a:rPr lang="en-GB" sz="6600" dirty="0" smtClean="0">
-                <a:solidFill>
-                  <a:srgbClr val="0070C0"/>
-                </a:solidFill>
-                <a:latin typeface="Franklin Gothic Demi" pitchFamily="34" charset="0"/>
+              <a:t>Tsy tsapanay tokoa</a:t>
+            </a:r>
+          </a:p>
+          <a:p>
+            <a:pPr algn="ctr"/>
+            <a:r>
+              <a:rPr lang="en-US" sz="4500" b="true">
+                <a:solidFill>
+                  <a:srgbClr val="000000"/>
+                </a:solidFill>
+                <a:latin typeface="Verdana"/>
               </a:rPr>
-              <a:t>-</a:t>
-            </a:r>
-            <a:r>
-              <a:rPr lang="en-GB" sz="6600" dirty="0" smtClean="0">
-                <a:latin typeface="Franklin Gothic Demi" pitchFamily="34" charset="0"/>
+              <a:t>Ny antranao ry Ray</a:t>
+            </a:r>
+          </a:p>
+          <a:p>
+            <a:pPr algn="ctr"/>
+            <a:r>
+              <a:rPr lang="en-US" sz="4500" b="true">
+                <a:solidFill>
+                  <a:srgbClr val="000000"/>
+                </a:solidFill>
+                <a:latin typeface="Verdana"/>
               </a:rPr>
-              <a:t> </a:t>
-            </a:r>
-            <a:r>
-              <a:rPr lang="en-GB" sz="6600" dirty="0" err="1">
-                <a:latin typeface="Franklin Gothic Demi" pitchFamily="34" charset="0"/>
+              <a:t>Fa hay, ny zava-tsoa</a:t>
+            </a:r>
+          </a:p>
+          <a:p>
+            <a:pPr algn="ctr"/>
+            <a:r>
+              <a:rPr lang="en-US" sz="4500" b="true">
+                <a:solidFill>
+                  <a:srgbClr val="000000"/>
+                </a:solidFill>
+                <a:latin typeface="Verdana"/>
               </a:rPr>
-              <a:t>Tsy</a:t>
-            </a:r>
-            <a:r>
-              <a:rPr lang="en-GB" sz="6600" dirty="0">
-                <a:latin typeface="Franklin Gothic Demi" pitchFamily="34" charset="0"/>
-              </a:rPr>
-              <a:t> </a:t>
-            </a:r>
-            <a:r>
-              <a:rPr lang="en-GB" sz="6600" dirty="0" err="1">
-                <a:latin typeface="Franklin Gothic Demi" pitchFamily="34" charset="0"/>
-              </a:rPr>
-              <a:t>tsapanay</a:t>
-            </a:r>
-            <a:r>
-              <a:rPr lang="en-GB" sz="6600" dirty="0">
-                <a:latin typeface="Franklin Gothic Demi" pitchFamily="34" charset="0"/>
-              </a:rPr>
-              <a:t> </a:t>
-            </a:r>
-            <a:r>
-              <a:rPr lang="en-GB" sz="6600" dirty="0" err="1">
-                <a:latin typeface="Franklin Gothic Demi" pitchFamily="34" charset="0"/>
-              </a:rPr>
-              <a:t>tokoa</a:t>
-            </a:r>
-            <a:endParaRPr lang="en-GB" sz="6600" dirty="0" smtClean="0">
-              <a:latin typeface="Franklin Gothic Demi" pitchFamily="34" charset="0"/>
-            </a:endParaRPr>
-          </a:p>
-          <a:p>
-            <a:pPr algn="ctr"/>
-            <a:r>
-              <a:rPr lang="en-GB" sz="6600" dirty="0">
-                <a:latin typeface="Franklin Gothic Demi" pitchFamily="34" charset="0"/>
-              </a:rPr>
-              <a:t>   </a:t>
-            </a:r>
-            <a:r>
-              <a:rPr lang="en-GB" sz="6600" dirty="0" err="1">
-                <a:latin typeface="Franklin Gothic Demi" pitchFamily="34" charset="0"/>
-              </a:rPr>
-              <a:t>Ny</a:t>
-            </a:r>
-            <a:r>
-              <a:rPr lang="en-GB" sz="6600" dirty="0">
-                <a:latin typeface="Franklin Gothic Demi" pitchFamily="34" charset="0"/>
-              </a:rPr>
-              <a:t> </a:t>
-            </a:r>
-            <a:r>
-              <a:rPr lang="en-GB" sz="6600" dirty="0" err="1">
-                <a:latin typeface="Franklin Gothic Demi" pitchFamily="34" charset="0"/>
-              </a:rPr>
-              <a:t>antranao</a:t>
-            </a:r>
-            <a:r>
-              <a:rPr lang="en-GB" sz="6600" dirty="0">
-                <a:latin typeface="Franklin Gothic Demi" pitchFamily="34" charset="0"/>
-              </a:rPr>
-              <a:t> </a:t>
-            </a:r>
-            <a:r>
-              <a:rPr lang="en-GB" sz="6600" dirty="0" err="1">
-                <a:latin typeface="Franklin Gothic Demi" pitchFamily="34" charset="0"/>
-              </a:rPr>
-              <a:t>ry</a:t>
-            </a:r>
-            <a:r>
-              <a:rPr lang="en-GB" sz="6600" dirty="0">
-                <a:latin typeface="Franklin Gothic Demi" pitchFamily="34" charset="0"/>
-              </a:rPr>
-              <a:t> Ray</a:t>
-            </a:r>
-            <a:endParaRPr lang="en-GB" sz="6600" dirty="0" smtClean="0">
-              <a:latin typeface="Franklin Gothic Demi" pitchFamily="34" charset="0"/>
-            </a:endParaRPr>
-          </a:p>
-          <a:p>
-            <a:pPr algn="ctr"/>
-            <a:r>
-              <a:rPr lang="en-GB" sz="6600" dirty="0">
-                <a:latin typeface="Franklin Gothic Demi" pitchFamily="34" charset="0"/>
-              </a:rPr>
-              <a:t>   </a:t>
-            </a:r>
-            <a:r>
-              <a:rPr lang="en-GB" sz="6600" dirty="0" err="1">
-                <a:latin typeface="Franklin Gothic Demi" pitchFamily="34" charset="0"/>
-              </a:rPr>
-              <a:t>Fa</a:t>
-            </a:r>
-            <a:r>
-              <a:rPr lang="en-GB" sz="6600" dirty="0">
-                <a:latin typeface="Franklin Gothic Demi" pitchFamily="34" charset="0"/>
-              </a:rPr>
-              <a:t> hay, </a:t>
-            </a:r>
-            <a:r>
-              <a:rPr lang="en-GB" sz="6600" dirty="0" err="1">
-                <a:latin typeface="Franklin Gothic Demi" pitchFamily="34" charset="0"/>
-              </a:rPr>
-              <a:t>ny</a:t>
-            </a:r>
-            <a:r>
-              <a:rPr lang="en-GB" sz="6600" dirty="0">
-                <a:latin typeface="Franklin Gothic Demi" pitchFamily="34" charset="0"/>
-              </a:rPr>
-              <a:t> </a:t>
-            </a:r>
-            <a:r>
-              <a:rPr lang="en-GB" sz="6600" dirty="0" err="1">
-                <a:latin typeface="Franklin Gothic Demi" pitchFamily="34" charset="0"/>
-              </a:rPr>
-              <a:t>zava-tsoa</a:t>
-            </a:r>
-            <a:endParaRPr lang="en-GB" sz="6600" dirty="0" smtClean="0">
-              <a:latin typeface="Franklin Gothic Demi" pitchFamily="34" charset="0"/>
-            </a:endParaRPr>
-          </a:p>
-          <a:p>
-            <a:pPr algn="ctr"/>
-            <a:r>
-              <a:rPr lang="en-GB" sz="6600" dirty="0">
-                <a:latin typeface="Franklin Gothic Demi" pitchFamily="34" charset="0"/>
-              </a:rPr>
-              <a:t>   </a:t>
-            </a:r>
-            <a:r>
-              <a:rPr lang="en-GB" sz="6600" dirty="0" err="1">
-                <a:latin typeface="Franklin Gothic Demi" pitchFamily="34" charset="0"/>
-              </a:rPr>
-              <a:t>Dia</a:t>
-            </a:r>
-            <a:r>
-              <a:rPr lang="en-GB" sz="6600" dirty="0">
-                <a:latin typeface="Franklin Gothic Demi" pitchFamily="34" charset="0"/>
-              </a:rPr>
-              <a:t> </a:t>
-            </a:r>
-            <a:r>
-              <a:rPr lang="en-GB" sz="6600" dirty="0" err="1">
-                <a:latin typeface="Franklin Gothic Demi" pitchFamily="34" charset="0"/>
-              </a:rPr>
-              <a:t>takona</a:t>
-            </a:r>
-            <a:r>
-              <a:rPr lang="en-GB" sz="6600" dirty="0">
-                <a:latin typeface="Franklin Gothic Demi" pitchFamily="34" charset="0"/>
-              </a:rPr>
-              <a:t> </a:t>
-            </a:r>
-            <a:r>
-              <a:rPr lang="en-GB" sz="6600" dirty="0" err="1">
-                <a:latin typeface="Franklin Gothic Demi" pitchFamily="34" charset="0"/>
-              </a:rPr>
-              <a:t>aminay</a:t>
-            </a:r>
-            <a:r>
-              <a:rPr lang="en-GB" sz="6600" dirty="0">
-                <a:latin typeface="Franklin Gothic Demi" pitchFamily="34" charset="0"/>
-              </a:rPr>
-              <a:t> !</a:t>
-            </a:r>
-            <a:endParaRPr lang="en-GB" sz="6600" dirty="0" smtClean="0">
-              <a:latin typeface="Franklin Gothic Demi" pitchFamily="34" charset="0"/>
-            </a:endParaRPr>
-          </a:p>
-          <a:p>
-            <a:pPr algn="ctr"/>
-            <a:r>
-              <a:rPr lang="sv-SE" sz="6600" dirty="0" smtClean="0">
-                <a:latin typeface="Franklin Gothic Demi" pitchFamily="34" charset="0"/>
-              </a:rPr>
-              <a:t>.</a:t>
-            </a:r>
-            <a:endParaRPr lang="sv-SE" sz="6600" dirty="0">
-              <a:latin typeface="Franklin Gothic Demi" pitchFamily="34" charset="0"/>
-            </a:endParaRPr>
+              <a:t>Dia takona aminay !</a:t>
+            </a:r>
           </a:p>
         </p:txBody>
       </p:sp>
     </p:spTree>
-    <p:extLst>
-      <p:ext uri="{BB962C8B-B14F-4D97-AF65-F5344CB8AC3E}">
-        <p14:creationId xmlns:p14="http://schemas.microsoft.com/office/powerpoint/2010/main" val="2608315365"/>
-      </p:ext>
-    </p:extLst>
   </p:cSld>
   <p:clrMapOvr>
     <a:masterClrMapping/>
@@ -4821,7 +3818,7 @@
 </file>
 
 <file path=ppt/slides/slide6.xml><?xml version="1.0" encoding="utf-8"?>
-<p:sld xmlns:a="http://schemas.openxmlformats.org/drawingml/2006/main" xmlns:r="http://schemas.openxmlformats.org/officeDocument/2006/relationships" xmlns:p="http://schemas.openxmlformats.org/presentationml/2006/main">
+<p:sld xmlns:p="http://schemas.openxmlformats.org/presentationml/2006/main" xmlns:a="http://schemas.openxmlformats.org/drawingml/2006/main">
   <p:cSld>
     <p:spTree>
       <p:nvGrpSpPr>
@@ -4839,292 +3836,134 @@
       </p:grpSpPr>
       <p:sp>
         <p:nvSpPr>
-          <p:cNvPr id="4" name="Rectangle 1"/>
-          <p:cNvSpPr>
-            <a:spLocks noChangeArrowheads="1"/>
-          </p:cNvSpPr>
+          <p:cNvPr name="TextBox 2" id="2"/>
+          <p:cNvSpPr txBox="true"/>
           <p:nvPr/>
         </p:nvSpPr>
-        <p:spPr bwMode="auto">
+        <p:spPr>
           <a:xfrm>
-            <a:off x="107504" y="348426"/>
-            <a:ext cx="9036496" cy="6186309"/>
+            <a:off x="635000" y="127000"/>
+            <a:ext cx="10922000" cy="508000"/>
           </a:xfrm>
           <a:prstGeom prst="rect">
             <a:avLst/>
           </a:prstGeom>
-          <a:noFill/>
-          <a:ln>
-            <a:noFill/>
-          </a:ln>
-          <a:effectLst/>
-          <a:extLst>
-            <a:ext uri="{909E8E84-426E-40DD-AFC4-6F175D3DCCD1}">
-              <a14:hiddenFill xmlns:a14="http://schemas.microsoft.com/office/drawing/2010/main">
-                <a:solidFill>
-                  <a:schemeClr val="accent1"/>
-                </a:solidFill>
-              </a14:hiddenFill>
-            </a:ext>
-            <a:ext uri="{91240B29-F687-4F45-9708-019B960494DF}">
-              <a14:hiddenLine xmlns:a14="http://schemas.microsoft.com/office/drawing/2010/main" w="9525">
-                <a:solidFill>
-                  <a:schemeClr val="tx1"/>
-                </a:solidFill>
-                <a:miter lim="800000"/>
-                <a:headEnd/>
-                <a:tailEnd/>
-              </a14:hiddenLine>
-            </a:ext>
-            <a:ext uri="{AF507438-7753-43E0-B8FC-AC1667EBCBE1}">
-              <a14:hiddenEffects xmlns:a14="http://schemas.microsoft.com/office/drawing/2010/main">
-                <a:effectLst>
-                  <a:outerShdw dist="35921" dir="2700000" algn="ctr" rotWithShape="0">
-                    <a:schemeClr val="bg2"/>
-                  </a:outerShdw>
-                </a:effectLst>
-              </a14:hiddenEffects>
-            </a:ext>
-          </a:extLst>
         </p:spPr>
         <p:txBody>
-          <a:bodyPr vert="horz" wrap="square" lIns="91440" tIns="45720" rIns="91440" bIns="45720" numCol="1" anchor="ctr" anchorCtr="0" compatLnSpc="1">
-            <a:prstTxWarp prst="textNoShape">
-              <a:avLst/>
-            </a:prstTxWarp>
-            <a:spAutoFit/>
-          </a:bodyPr>
-          <a:lstStyle/>
-          <a:p>
-            <a:pPr marL="0" marR="0" lvl="0" indent="0" algn="ctr" defTabSz="914400" rtl="0" eaLnBrk="1" fontAlgn="base" latinLnBrk="0" hangingPunct="1">
-              <a:lnSpc>
-                <a:spcPct val="100000"/>
-              </a:lnSpc>
-              <a:spcBef>
-                <a:spcPct val="0"/>
-              </a:spcBef>
-              <a:spcAft>
-                <a:spcPct val="0"/>
-              </a:spcAft>
-              <a:buClrTx/>
-              <a:buSzTx/>
-              <a:buFontTx/>
-              <a:buNone/>
-              <a:tabLst/>
+          <a:bodyPr anchor="t" rtlCol="false"/>
+          <a:lstStyle/>
+          <a:p>
+            <a:pPr algn="l">
+              <a:defRPr/>
             </a:pPr>
             <a:r>
-              <a:rPr lang="en-GB" sz="6600" dirty="0" smtClean="0">
+              <a:rPr lang="fr-MG"/>
+              <a:t/>
+            </a:r>
+            <a:endParaRPr lang="en-US" sz="1100"/>
+          </a:p>
+          <a:p>
+            <a:pPr algn="ctr"/>
+            <a:r>
+              <a:rPr lang="en-US" sz="3200" b="true">
                 <a:solidFill>
                   <a:srgbClr val="0000FF"/>
                 </a:solidFill>
-                <a:latin typeface="Franklin Gothic Demi" pitchFamily="34" charset="0"/>
-                <a:cs typeface="Times New Roman" pitchFamily="18" charset="0"/>
+                <a:latin typeface="Verdana"/>
               </a:rPr>
-              <a:t>FF 49</a:t>
-            </a:r>
-            <a:endParaRPr kumimoji="0" lang="en-GB" sz="6600" b="0" i="0" u="none" strike="noStrike" cap="none" normalizeH="0" baseline="0" dirty="0" smtClean="0">
-              <a:ln>
-                <a:noFill/>
-              </a:ln>
-              <a:solidFill>
-                <a:srgbClr val="0000FF"/>
-              </a:solidFill>
-              <a:effectLst/>
-              <a:latin typeface="Franklin Gothic Demi" pitchFamily="34" charset="0"/>
-              <a:cs typeface="Times New Roman" pitchFamily="18" charset="0"/>
-            </a:endParaRPr>
+              <a:t>HIRA 49</a:t>
+            </a:r>
+          </a:p>
+        </p:txBody>
+      </p:sp>
+      <p:sp>
+        <p:nvSpPr>
+          <p:cNvPr name="TextBox 3" id="3"/>
+          <p:cNvSpPr txBox="true"/>
+          <p:nvPr/>
+        </p:nvSpPr>
+        <p:spPr>
+          <a:xfrm>
+            <a:off x="635000" y="762000"/>
+            <a:ext cx="10922000" cy="5588000"/>
+          </a:xfrm>
+          <a:prstGeom prst="rect">
+            <a:avLst/>
+          </a:prstGeom>
+        </p:spPr>
+        <p:txBody>
+          <a:bodyPr anchor="t" rtlCol="false"/>
+          <a:lstStyle/>
+          <a:p>
+            <a:pPr algn="l">
+              <a:defRPr/>
+            </a:pPr>
+            <a:r>
+              <a:rPr lang="fr-MG"/>
+              <a:t/>
+            </a:r>
+            <a:endParaRPr lang="en-US" sz="1100"/>
           </a:p>
           <a:p>
             <a:pPr algn="ctr"/>
             <a:r>
-              <a:rPr lang="en-GB" sz="6600" dirty="0">
-                <a:latin typeface="Franklin Gothic Demi" pitchFamily="34" charset="0"/>
+              <a:rPr lang="en-US" sz="4500" b="true">
+                <a:solidFill>
+                  <a:srgbClr val="0000FF"/>
+                </a:solidFill>
+                <a:latin typeface="Verdana"/>
               </a:rPr>
-              <a:t> </a:t>
-            </a:r>
-            <a:r>
-              <a:rPr lang="en-GB" sz="6600" dirty="0" smtClean="0">
-                <a:solidFill>
-                  <a:srgbClr val="0070C0"/>
-                </a:solidFill>
-                <a:latin typeface="Franklin Gothic Demi" pitchFamily="34" charset="0"/>
+              <a:t>6- </a:t>
+            </a:r>
+            <a:r>
+              <a:rPr lang="en-US" sz="4500" b="true">
+                <a:solidFill>
+                  <a:srgbClr val="000000"/>
+                </a:solidFill>
+                <a:latin typeface="Verdana"/>
               </a:rPr>
-              <a:t>6-</a:t>
-            </a:r>
-            <a:r>
-              <a:rPr lang="en-GB" sz="6600" dirty="0" smtClean="0">
-                <a:latin typeface="Franklin Gothic Demi" pitchFamily="34" charset="0"/>
+              <a:t>Maniry fahafahana</a:t>
+            </a:r>
+          </a:p>
+          <a:p>
+            <a:pPr algn="ctr"/>
+            <a:r>
+              <a:rPr lang="en-US" sz="4500" b="true">
+                <a:solidFill>
+                  <a:srgbClr val="000000"/>
+                </a:solidFill>
+                <a:latin typeface="Verdana"/>
               </a:rPr>
-              <a:t> </a:t>
-            </a:r>
-            <a:r>
-              <a:rPr lang="en-GB" sz="6600" dirty="0" err="1">
-                <a:latin typeface="Franklin Gothic Demi" pitchFamily="34" charset="0"/>
+              <a:t>Izao ‘ty fo madio</a:t>
+            </a:r>
+          </a:p>
+          <a:p>
+            <a:pPr algn="ctr"/>
+            <a:r>
+              <a:rPr lang="en-US" sz="4500" b="true">
+                <a:solidFill>
+                  <a:srgbClr val="000000"/>
+                </a:solidFill>
+                <a:latin typeface="Verdana"/>
               </a:rPr>
-              <a:t>Maniry</a:t>
-            </a:r>
-            <a:r>
-              <a:rPr lang="en-GB" sz="6600" dirty="0">
-                <a:latin typeface="Franklin Gothic Demi" pitchFamily="34" charset="0"/>
+              <a:t>Ekeo ny fibebahana</a:t>
+            </a:r>
+          </a:p>
+          <a:p>
+            <a:pPr algn="ctr"/>
+            <a:r>
+              <a:rPr lang="en-US" sz="4500" b="true">
+                <a:solidFill>
+                  <a:srgbClr val="000000"/>
+                </a:solidFill>
+                <a:latin typeface="Verdana"/>
               </a:rPr>
-              <a:t> </a:t>
-            </a:r>
-            <a:r>
-              <a:rPr lang="en-GB" sz="6600" dirty="0" err="1">
-                <a:latin typeface="Franklin Gothic Demi" pitchFamily="34" charset="0"/>
-              </a:rPr>
-              <a:t>fahafahana</a:t>
-            </a:r>
-            <a:endParaRPr lang="en-GB" sz="6600" dirty="0" smtClean="0">
-              <a:latin typeface="Franklin Gothic Demi" pitchFamily="34" charset="0"/>
-            </a:endParaRPr>
-          </a:p>
-          <a:p>
-            <a:pPr algn="ctr"/>
-            <a:r>
-              <a:rPr lang="en-GB" sz="6600" dirty="0">
-                <a:latin typeface="Franklin Gothic Demi" pitchFamily="34" charset="0"/>
-              </a:rPr>
-              <a:t>   </a:t>
-            </a:r>
-            <a:r>
-              <a:rPr lang="en-GB" sz="6600" dirty="0" err="1">
-                <a:latin typeface="Franklin Gothic Demi" pitchFamily="34" charset="0"/>
-              </a:rPr>
-              <a:t>Izao</a:t>
-            </a:r>
-            <a:r>
-              <a:rPr lang="en-GB" sz="6600" dirty="0">
-                <a:latin typeface="Franklin Gothic Demi" pitchFamily="34" charset="0"/>
-              </a:rPr>
-              <a:t> ‘</a:t>
-            </a:r>
-            <a:r>
-              <a:rPr lang="en-GB" sz="6600" dirty="0" err="1">
-                <a:latin typeface="Franklin Gothic Demi" pitchFamily="34" charset="0"/>
-              </a:rPr>
-              <a:t>ty</a:t>
-            </a:r>
-            <a:r>
-              <a:rPr lang="en-GB" sz="6600" dirty="0">
-                <a:latin typeface="Franklin Gothic Demi" pitchFamily="34" charset="0"/>
-              </a:rPr>
-              <a:t> </a:t>
-            </a:r>
-            <a:r>
-              <a:rPr lang="en-GB" sz="6600" dirty="0" err="1">
-                <a:latin typeface="Franklin Gothic Demi" pitchFamily="34" charset="0"/>
-              </a:rPr>
-              <a:t>fo</a:t>
-            </a:r>
-            <a:r>
-              <a:rPr lang="en-GB" sz="6600" dirty="0">
-                <a:latin typeface="Franklin Gothic Demi" pitchFamily="34" charset="0"/>
-              </a:rPr>
-              <a:t> </a:t>
-            </a:r>
-            <a:r>
-              <a:rPr lang="en-GB" sz="6600" dirty="0" err="1">
-                <a:latin typeface="Franklin Gothic Demi" pitchFamily="34" charset="0"/>
-              </a:rPr>
-              <a:t>madio</a:t>
-            </a:r>
-            <a:endParaRPr lang="en-GB" sz="6600" dirty="0" smtClean="0">
-              <a:latin typeface="Franklin Gothic Demi" pitchFamily="34" charset="0"/>
-            </a:endParaRPr>
-          </a:p>
-          <a:p>
-            <a:pPr algn="ctr"/>
-            <a:r>
-              <a:rPr lang="en-GB" sz="6600" dirty="0">
-                <a:latin typeface="Franklin Gothic Demi" pitchFamily="34" charset="0"/>
-              </a:rPr>
-              <a:t>   </a:t>
-            </a:r>
-            <a:r>
-              <a:rPr lang="en-GB" sz="6600" dirty="0" err="1">
-                <a:latin typeface="Franklin Gothic Demi" pitchFamily="34" charset="0"/>
-              </a:rPr>
-              <a:t>Ekeo</a:t>
-            </a:r>
-            <a:r>
-              <a:rPr lang="en-GB" sz="6600" dirty="0">
-                <a:latin typeface="Franklin Gothic Demi" pitchFamily="34" charset="0"/>
-              </a:rPr>
-              <a:t> </a:t>
-            </a:r>
-            <a:r>
-              <a:rPr lang="en-GB" sz="6600" dirty="0" err="1">
-                <a:latin typeface="Franklin Gothic Demi" pitchFamily="34" charset="0"/>
-              </a:rPr>
-              <a:t>ny</a:t>
-            </a:r>
-            <a:r>
-              <a:rPr lang="en-GB" sz="6600" dirty="0">
-                <a:latin typeface="Franklin Gothic Demi" pitchFamily="34" charset="0"/>
-              </a:rPr>
-              <a:t> </a:t>
-            </a:r>
-            <a:r>
-              <a:rPr lang="en-GB" sz="6600" dirty="0" err="1">
-                <a:latin typeface="Franklin Gothic Demi" pitchFamily="34" charset="0"/>
-              </a:rPr>
-              <a:t>fibebahana</a:t>
-            </a:r>
-            <a:endParaRPr lang="en-GB" sz="6600" dirty="0" smtClean="0">
-              <a:latin typeface="Franklin Gothic Demi" pitchFamily="34" charset="0"/>
-            </a:endParaRPr>
-          </a:p>
-          <a:p>
-            <a:pPr algn="ctr"/>
-            <a:r>
-              <a:rPr lang="en-GB" sz="6600" dirty="0">
-                <a:latin typeface="Franklin Gothic Demi" pitchFamily="34" charset="0"/>
-              </a:rPr>
-              <a:t>   </a:t>
-            </a:r>
-            <a:r>
-              <a:rPr lang="en-GB" sz="6600" dirty="0" err="1">
-                <a:latin typeface="Franklin Gothic Demi" pitchFamily="34" charset="0"/>
-              </a:rPr>
-              <a:t>Atolotray</a:t>
-            </a:r>
-            <a:r>
-              <a:rPr lang="en-GB" sz="6600" dirty="0">
-                <a:latin typeface="Franklin Gothic Demi" pitchFamily="34" charset="0"/>
-              </a:rPr>
-              <a:t> </a:t>
-            </a:r>
-            <a:r>
-              <a:rPr lang="en-GB" sz="6600" dirty="0" err="1">
-                <a:latin typeface="Franklin Gothic Demi" pitchFamily="34" charset="0"/>
-              </a:rPr>
-              <a:t>anio</a:t>
-            </a:r>
-            <a:r>
-              <a:rPr lang="en-GB" sz="6600" dirty="0">
-                <a:latin typeface="Franklin Gothic Demi" pitchFamily="34" charset="0"/>
-              </a:rPr>
-              <a:t>.</a:t>
-            </a:r>
-            <a:endParaRPr lang="en-GB" sz="6600" dirty="0" smtClean="0">
-              <a:latin typeface="Franklin Gothic Demi" pitchFamily="34" charset="0"/>
-            </a:endParaRPr>
-          </a:p>
-          <a:p>
-            <a:pPr algn="ctr"/>
-            <a:endParaRPr lang="sv-SE" sz="6600" dirty="0">
-              <a:latin typeface="Franklin Gothic Demi" pitchFamily="34" charset="0"/>
-            </a:endParaRPr>
+              <a:t>Atolotray anio.</a:t>
+            </a:r>
           </a:p>
         </p:txBody>
       </p:sp>
     </p:spTree>
-    <p:extLst>
-      <p:ext uri="{BB962C8B-B14F-4D97-AF65-F5344CB8AC3E}">
-        <p14:creationId xmlns:p14="http://schemas.microsoft.com/office/powerpoint/2010/main" val="3098352632"/>
-      </p:ext>
-    </p:extLst>
   </p:cSld>
   <p:clrMapOvr>
     <a:masterClrMapping/>
@@ -5133,7 +3972,7 @@
 </file>
 
 <file path=ppt/theme/theme1.xml><?xml version="1.0" encoding="utf-8"?>
-<a:theme xmlns:a="http://schemas.openxmlformats.org/drawingml/2006/main" name="Thème Office">
+<a:theme xmlns:a="http://schemas.openxmlformats.org/drawingml/2006/main" name="Office Theme">
   <a:themeElements>
     <a:clrScheme name="Office">
       <a:dk1>
@@ -5207,7 +4046,6 @@
         <a:font script="Mong" typeface="Mongolian Baiti"/>
         <a:font script="Viet" typeface="Times New Roman"/>
         <a:font script="Uigh" typeface="Microsoft Uighur"/>
-        <a:font script="Geor" typeface="Sylfaen"/>
       </a:majorFont>
       <a:minorFont>
         <a:latin typeface="Calibri"/>
@@ -5242,7 +4080,6 @@
         <a:font script="Mong" typeface="Mongolian Baiti"/>
         <a:font script="Viet" typeface="Arial"/>
         <a:font script="Uigh" typeface="Microsoft Uighur"/>
-        <a:font script="Geor" typeface="Sylfaen"/>
       </a:minorFont>
     </a:fontScheme>
     <a:fmtScheme name="Office">
